--- a/make_presentation/templates/templates/flow/no_logo_9.pptx
+++ b/make_presentation/templates/templates/flow/no_logo_9.pptx
@@ -68,29 +68,17 @@
             <a:noAutofit/>
           </a:bodyPr>
           <a:p>
-            <a:r>
-              <a:rPr b="0" lang="en-US" sz="1800" spc="-1" strike="noStrike">
-                <a:solidFill>
-                  <a:srgbClr val="000000"/>
-                </a:solidFill>
-                <a:latin typeface="Calibri"/>
-              </a:rPr>
-              <a:t>Для перемещения страницы </a:t>
-            </a:r>
-            <a:r>
-              <a:rPr b="0" lang="en-US" sz="1800" spc="-1" strike="noStrike">
-                <a:solidFill>
-                  <a:srgbClr val="000000"/>
-                </a:solidFill>
-                <a:latin typeface="Calibri"/>
-              </a:rPr>
-              <a:t>щёлкните мышью</a:t>
-            </a:r>
-            <a:endParaRPr b="0" lang="en-US" sz="1800" spc="-1" strike="noStrike">
-              <a:solidFill>
-                <a:srgbClr val="000000"/>
-              </a:solidFill>
-              <a:latin typeface="Calibri"/>
+            <a:pPr algn="ctr">
+              <a:buNone/>
+            </a:pPr>
+            <a:r>
+              <a:rPr b="0" lang="en-US" sz="4400" spc="-1" strike="noStrike">
+                <a:latin typeface="Arial"/>
+              </a:rPr>
+              <a:t>Click to move the slide</a:t>
+            </a:r>
+            <a:endParaRPr b="0" lang="en-US" sz="4400" spc="-1" strike="noStrike">
+              <a:latin typeface="Arial"/>
             </a:endParaRPr>
           </a:p>
         </p:txBody>
@@ -124,12 +112,12 @@
           </a:bodyPr>
           <a:p>
             <a:r>
-              <a:rPr b="0" lang="ru-RU" sz="2000" spc="-1" strike="noStrike">
-                <a:latin typeface="Arial"/>
-              </a:rPr>
-              <a:t>Для правки формата примечаний щёлкните мышью</a:t>
-            </a:r>
-            <a:endParaRPr b="0" lang="ru-RU" sz="2000" spc="-1" strike="noStrike">
+              <a:rPr b="0" lang="en-US" sz="2000" spc="-1" strike="noStrike">
+                <a:latin typeface="Arial"/>
+              </a:rPr>
+              <a:t>Click to edit the notes format</a:t>
+            </a:r>
+            <a:endParaRPr b="0" lang="en-US" sz="2000" spc="-1" strike="noStrike">
               <a:latin typeface="Arial"/>
             </a:endParaRPr>
           </a:p>
@@ -164,12 +152,12 @@
           </a:bodyPr>
           <a:p>
             <a:r>
-              <a:rPr b="0" lang="ru-RU" sz="1400" spc="-1" strike="noStrike">
+              <a:rPr b="0" lang="en-US" sz="1400" spc="-1" strike="noStrike">
                 <a:latin typeface="Times New Roman"/>
               </a:rPr>
-              <a:t>&lt;верхний колонтитул&gt;</a:t>
-            </a:r>
-            <a:endParaRPr b="0" lang="ru-RU" sz="1400" spc="-1" strike="noStrike">
+              <a:t>&lt;header&gt;</a:t>
+            </a:r>
+            <a:endParaRPr b="0" lang="en-US" sz="1400" spc="-1" strike="noStrike">
               <a:latin typeface="Times New Roman"/>
             </a:endParaRPr>
           </a:p>
@@ -205,7 +193,7 @@
           <a:lstStyle>
             <a:lvl1pPr algn="r">
               <a:buNone/>
-              <a:defRPr b="0" lang="ru-RU" sz="1400" spc="-1" strike="noStrike">
+              <a:defRPr b="0" lang="en-US" sz="1400" spc="-1" strike="noStrike">
                 <a:latin typeface="Times New Roman"/>
               </a:defRPr>
             </a:lvl1pPr>
@@ -215,12 +203,12 @@
               <a:buNone/>
             </a:pPr>
             <a:r>
-              <a:rPr b="0" lang="ru-RU" sz="1400" spc="-1" strike="noStrike">
+              <a:rPr b="0" lang="en-US" sz="1400" spc="-1" strike="noStrike">
                 <a:latin typeface="Times New Roman"/>
               </a:rPr>
-              <a:t>&lt;дата/время&gt;</a:t>
-            </a:r>
-            <a:endParaRPr b="0" lang="ru-RU" sz="1400" spc="-1" strike="noStrike">
+              <a:t>&lt;date/time&gt;</a:t>
+            </a:r>
+            <a:endParaRPr b="0" lang="en-US" sz="1400" spc="-1" strike="noStrike">
               <a:latin typeface="Times New Roman"/>
             </a:endParaRPr>
           </a:p>
@@ -255,19 +243,19 @@
           </a:bodyPr>
           <a:lstStyle>
             <a:lvl1pPr>
-              <a:defRPr b="0" lang="ru-RU" sz="1400" spc="-1" strike="noStrike">
+              <a:defRPr b="0" lang="en-US" sz="1400" spc="-1" strike="noStrike">
                 <a:latin typeface="Times New Roman"/>
               </a:defRPr>
             </a:lvl1pPr>
           </a:lstStyle>
           <a:p>
             <a:r>
-              <a:rPr b="0" lang="ru-RU" sz="1400" spc="-1" strike="noStrike">
+              <a:rPr b="0" lang="en-US" sz="1400" spc="-1" strike="noStrike">
                 <a:latin typeface="Times New Roman"/>
               </a:rPr>
-              <a:t>&lt;нижний колонтитул&gt;</a:t>
-            </a:r>
-            <a:endParaRPr b="0" lang="ru-RU" sz="1400" spc="-1" strike="noStrike">
+              <a:t>&lt;footer&gt;</a:t>
+            </a:r>
+            <a:endParaRPr b="0" lang="en-US" sz="1400" spc="-1" strike="noStrike">
               <a:latin typeface="Times New Roman"/>
             </a:endParaRPr>
           </a:p>
@@ -303,7 +291,7 @@
           <a:lstStyle>
             <a:lvl1pPr algn="r">
               <a:buNone/>
-              <a:defRPr b="0" lang="ru-RU" sz="1400" spc="-1" strike="noStrike">
+              <a:defRPr b="0" lang="en-US" sz="1400" spc="-1" strike="noStrike">
                 <a:latin typeface="Times New Roman"/>
               </a:defRPr>
             </a:lvl1pPr>
@@ -312,13 +300,13 @@
             <a:pPr algn="r">
               <a:buNone/>
             </a:pPr>
-            <a:fld id="{53B88F60-EF48-4F58-8760-7C24647D7C37}" type="slidenum">
-              <a:rPr b="0" lang="ru-RU" sz="1400" spc="-1" strike="noStrike">
+            <a:fld id="{DE0BFD74-6902-4708-96BD-0A21E432DA31}" type="slidenum">
+              <a:rPr b="0" lang="en-US" sz="1400" spc="-1" strike="noStrike">
                 <a:latin typeface="Times New Roman"/>
               </a:rPr>
-              <a:t>&lt;номер&gt;</a:t>
+              <a:t>&lt;number&gt;</a:t>
             </a:fld>
-            <a:endParaRPr b="0" lang="ru-RU" sz="1400" spc="-1" strike="noStrike">
+            <a:endParaRPr b="0" lang="en-US" sz="1400" spc="-1" strike="noStrike">
               <a:latin typeface="Times New Roman"/>
             </a:endParaRPr>
           </a:p>
@@ -349,7 +337,7 @@
       </p:grpSpPr>
       <p:sp>
         <p:nvSpPr>
-          <p:cNvPr id="138" name="PlaceHolder 1"/>
+          <p:cNvPr id="137" name="PlaceHolder 1"/>
           <p:cNvSpPr>
             <a:spLocks noGrp="1"/>
           </p:cNvSpPr>
@@ -360,19 +348,19 @@
         <p:spPr>
           <a:xfrm>
             <a:off x="685800" y="1143000"/>
-            <a:ext cx="5486040" cy="3085920"/>
-          </a:xfrm>
-          <a:prstGeom prst="rect">
-            <a:avLst/>
-          </a:prstGeom>
-          <a:ln w="0">
-            <a:noFill/>
-          </a:ln>
-        </p:spPr>
-      </p:sp>
-      <p:sp>
-        <p:nvSpPr>
-          <p:cNvPr id="139" name="PlaceHolder 2"/>
+            <a:ext cx="5485680" cy="3085560"/>
+          </a:xfrm>
+          <a:prstGeom prst="rect">
+            <a:avLst/>
+          </a:prstGeom>
+          <a:ln w="0">
+            <a:noFill/>
+          </a:ln>
+        </p:spPr>
+      </p:sp>
+      <p:sp>
+        <p:nvSpPr>
+          <p:cNvPr id="138" name="PlaceHolder 2"/>
           <p:cNvSpPr>
             <a:spLocks noGrp="1"/>
           </p:cNvSpPr>
@@ -383,30 +371,30 @@
         <p:spPr>
           <a:xfrm>
             <a:off x="685800" y="4400640"/>
-            <a:ext cx="5486040" cy="3600000"/>
-          </a:xfrm>
-          <a:prstGeom prst="rect">
-            <a:avLst/>
-          </a:prstGeom>
-          <a:noFill/>
-          <a:ln w="0">
-            <a:noFill/>
-          </a:ln>
-        </p:spPr>
-        <p:txBody>
-          <a:bodyPr anchor="t">
-            <a:noAutofit/>
-          </a:bodyPr>
-          <a:p>
-            <a:endParaRPr b="0" lang="ru-RU" sz="2000" spc="-1" strike="noStrike">
-              <a:latin typeface="Arial"/>
-            </a:endParaRPr>
-          </a:p>
-        </p:txBody>
-      </p:sp>
-      <p:sp>
-        <p:nvSpPr>
-          <p:cNvPr id="140" name="PlaceHolder 3"/>
+            <a:ext cx="5485680" cy="3599640"/>
+          </a:xfrm>
+          <a:prstGeom prst="rect">
+            <a:avLst/>
+          </a:prstGeom>
+          <a:noFill/>
+          <a:ln w="0">
+            <a:noFill/>
+          </a:ln>
+        </p:spPr>
+        <p:txBody>
+          <a:bodyPr lIns="0" rIns="0" tIns="0" bIns="0" anchor="t">
+            <a:noAutofit/>
+          </a:bodyPr>
+          <a:p>
+            <a:endParaRPr b="0" lang="en-US" sz="2000" spc="-1" strike="noStrike">
+              <a:latin typeface="Arial"/>
+            </a:endParaRPr>
+          </a:p>
+        </p:txBody>
+      </p:sp>
+      <p:sp>
+        <p:nvSpPr>
+          <p:cNvPr id="139" name="PlaceHolder 3"/>
           <p:cNvSpPr>
             <a:spLocks noGrp="1"/>
           </p:cNvSpPr>
@@ -417,18 +405,18 @@
         <p:spPr>
           <a:xfrm>
             <a:off x="3884760" y="8685360"/>
-            <a:ext cx="2971440" cy="458280"/>
-          </a:xfrm>
-          <a:prstGeom prst="rect">
-            <a:avLst/>
-          </a:prstGeom>
-          <a:noFill/>
-          <a:ln w="0">
-            <a:noFill/>
-          </a:ln>
-        </p:spPr>
-        <p:txBody>
-          <a:bodyPr anchor="b">
+            <a:ext cx="2971080" cy="457920"/>
+          </a:xfrm>
+          <a:prstGeom prst="rect">
+            <a:avLst/>
+          </a:prstGeom>
+          <a:noFill/>
+          <a:ln w="0">
+            <a:noFill/>
+          </a:ln>
+        </p:spPr>
+        <p:txBody>
+          <a:bodyPr lIns="0" rIns="0" tIns="0" bIns="0" anchor="b">
             <a:noAutofit/>
           </a:bodyPr>
           <a:lstStyle>
@@ -449,13 +437,13 @@
               </a:lnSpc>
               <a:buNone/>
             </a:pPr>
-            <a:fld id="{881B721C-98E3-45D5-B266-D30FA2D3FEAE}" type="slidenum">
+            <a:fld id="{8EF4937E-7319-43FE-8391-448407744203}" type="slidenum">
               <a:rPr b="0" lang="ru-RU" sz="1200" spc="-1" strike="noStrike">
                 <a:latin typeface="Times New Roman"/>
               </a:rPr>
-              <a:t>&lt;номер&gt;</a:t>
+              <a:t>&lt;number&gt;</a:t>
             </a:fld>
-            <a:endParaRPr b="0" lang="ru-RU" sz="1200" spc="-1" strike="noStrike">
+            <a:endParaRPr b="0" lang="en-US" sz="1200" spc="-1" strike="noStrike">
               <a:latin typeface="Times New Roman"/>
             </a:endParaRPr>
           </a:p>
@@ -485,7 +473,7 @@
       </p:grpSpPr>
       <p:sp>
         <p:nvSpPr>
-          <p:cNvPr id="141" name="PlaceHolder 1"/>
+          <p:cNvPr id="140" name="PlaceHolder 1"/>
           <p:cNvSpPr>
             <a:spLocks noGrp="1"/>
           </p:cNvSpPr>
@@ -496,19 +484,19 @@
         <p:spPr>
           <a:xfrm>
             <a:off x="685800" y="1143000"/>
-            <a:ext cx="5486040" cy="3085920"/>
-          </a:xfrm>
-          <a:prstGeom prst="rect">
-            <a:avLst/>
-          </a:prstGeom>
-          <a:ln w="0">
-            <a:noFill/>
-          </a:ln>
-        </p:spPr>
-      </p:sp>
-      <p:sp>
-        <p:nvSpPr>
-          <p:cNvPr id="142" name="PlaceHolder 2"/>
+            <a:ext cx="5485680" cy="3085560"/>
+          </a:xfrm>
+          <a:prstGeom prst="rect">
+            <a:avLst/>
+          </a:prstGeom>
+          <a:ln w="0">
+            <a:noFill/>
+          </a:ln>
+        </p:spPr>
+      </p:sp>
+      <p:sp>
+        <p:nvSpPr>
+          <p:cNvPr id="141" name="PlaceHolder 2"/>
           <p:cNvSpPr>
             <a:spLocks noGrp="1"/>
           </p:cNvSpPr>
@@ -519,30 +507,30 @@
         <p:spPr>
           <a:xfrm>
             <a:off x="685800" y="4400640"/>
-            <a:ext cx="5486040" cy="3600000"/>
-          </a:xfrm>
-          <a:prstGeom prst="rect">
-            <a:avLst/>
-          </a:prstGeom>
-          <a:noFill/>
-          <a:ln w="0">
-            <a:noFill/>
-          </a:ln>
-        </p:spPr>
-        <p:txBody>
-          <a:bodyPr anchor="t">
-            <a:noAutofit/>
-          </a:bodyPr>
-          <a:p>
-            <a:endParaRPr b="0" lang="ru-RU" sz="2000" spc="-1" strike="noStrike">
-              <a:latin typeface="Arial"/>
-            </a:endParaRPr>
-          </a:p>
-        </p:txBody>
-      </p:sp>
-      <p:sp>
-        <p:nvSpPr>
-          <p:cNvPr id="143" name="PlaceHolder 3"/>
+            <a:ext cx="5485680" cy="3599640"/>
+          </a:xfrm>
+          <a:prstGeom prst="rect">
+            <a:avLst/>
+          </a:prstGeom>
+          <a:noFill/>
+          <a:ln w="0">
+            <a:noFill/>
+          </a:ln>
+        </p:spPr>
+        <p:txBody>
+          <a:bodyPr lIns="0" rIns="0" tIns="0" bIns="0" anchor="t">
+            <a:noAutofit/>
+          </a:bodyPr>
+          <a:p>
+            <a:endParaRPr b="0" lang="en-US" sz="2000" spc="-1" strike="noStrike">
+              <a:latin typeface="Arial"/>
+            </a:endParaRPr>
+          </a:p>
+        </p:txBody>
+      </p:sp>
+      <p:sp>
+        <p:nvSpPr>
+          <p:cNvPr id="142" name="PlaceHolder 3"/>
           <p:cNvSpPr>
             <a:spLocks noGrp="1"/>
           </p:cNvSpPr>
@@ -553,18 +541,18 @@
         <p:spPr>
           <a:xfrm>
             <a:off x="3884760" y="8685360"/>
-            <a:ext cx="2971440" cy="458280"/>
-          </a:xfrm>
-          <a:prstGeom prst="rect">
-            <a:avLst/>
-          </a:prstGeom>
-          <a:noFill/>
-          <a:ln w="0">
-            <a:noFill/>
-          </a:ln>
-        </p:spPr>
-        <p:txBody>
-          <a:bodyPr anchor="b">
+            <a:ext cx="2971080" cy="457920"/>
+          </a:xfrm>
+          <a:prstGeom prst="rect">
+            <a:avLst/>
+          </a:prstGeom>
+          <a:noFill/>
+          <a:ln w="0">
+            <a:noFill/>
+          </a:ln>
+        </p:spPr>
+        <p:txBody>
+          <a:bodyPr lIns="0" rIns="0" tIns="0" bIns="0" anchor="b">
             <a:noAutofit/>
           </a:bodyPr>
           <a:lstStyle>
@@ -585,13 +573,13 @@
               </a:lnSpc>
               <a:buNone/>
             </a:pPr>
-            <a:fld id="{7111433B-D5FB-4055-AFC4-FA5C9E28DAD9}" type="slidenum">
+            <a:fld id="{E1918E54-09BA-4576-905C-32904E0E392D}" type="slidenum">
               <a:rPr b="0" lang="ru-RU" sz="1200" spc="-1" strike="noStrike">
                 <a:latin typeface="Times New Roman"/>
               </a:rPr>
-              <a:t>&lt;номер&gt;</a:t>
+              <a:t>&lt;number&gt;</a:t>
             </a:fld>
-            <a:endParaRPr b="0" lang="ru-RU" sz="1200" spc="-1" strike="noStrike">
+            <a:endParaRPr b="0" lang="en-US" sz="1200" spc="-1" strike="noStrike">
               <a:latin typeface="Times New Roman"/>
             </a:endParaRPr>
           </a:p>
@@ -621,7 +609,7 @@
       </p:grpSpPr>
       <p:sp>
         <p:nvSpPr>
-          <p:cNvPr id="144" name="PlaceHolder 1"/>
+          <p:cNvPr id="143" name="PlaceHolder 1"/>
           <p:cNvSpPr>
             <a:spLocks noGrp="1"/>
           </p:cNvSpPr>
@@ -632,19 +620,19 @@
         <p:spPr>
           <a:xfrm>
             <a:off x="685800" y="1143000"/>
-            <a:ext cx="5486040" cy="3085920"/>
-          </a:xfrm>
-          <a:prstGeom prst="rect">
-            <a:avLst/>
-          </a:prstGeom>
-          <a:ln w="0">
-            <a:noFill/>
-          </a:ln>
-        </p:spPr>
-      </p:sp>
-      <p:sp>
-        <p:nvSpPr>
-          <p:cNvPr id="145" name="PlaceHolder 2"/>
+            <a:ext cx="5485680" cy="3085560"/>
+          </a:xfrm>
+          <a:prstGeom prst="rect">
+            <a:avLst/>
+          </a:prstGeom>
+          <a:ln w="0">
+            <a:noFill/>
+          </a:ln>
+        </p:spPr>
+      </p:sp>
+      <p:sp>
+        <p:nvSpPr>
+          <p:cNvPr id="144" name="PlaceHolder 2"/>
           <p:cNvSpPr>
             <a:spLocks noGrp="1"/>
           </p:cNvSpPr>
@@ -655,30 +643,30 @@
         <p:spPr>
           <a:xfrm>
             <a:off x="685800" y="4400640"/>
-            <a:ext cx="5486040" cy="3600000"/>
-          </a:xfrm>
-          <a:prstGeom prst="rect">
-            <a:avLst/>
-          </a:prstGeom>
-          <a:noFill/>
-          <a:ln w="0">
-            <a:noFill/>
-          </a:ln>
-        </p:spPr>
-        <p:txBody>
-          <a:bodyPr anchor="t">
-            <a:noAutofit/>
-          </a:bodyPr>
-          <a:p>
-            <a:endParaRPr b="0" lang="ru-RU" sz="2000" spc="-1" strike="noStrike">
-              <a:latin typeface="Arial"/>
-            </a:endParaRPr>
-          </a:p>
-        </p:txBody>
-      </p:sp>
-      <p:sp>
-        <p:nvSpPr>
-          <p:cNvPr id="146" name="PlaceHolder 3"/>
+            <a:ext cx="5485680" cy="3599640"/>
+          </a:xfrm>
+          <a:prstGeom prst="rect">
+            <a:avLst/>
+          </a:prstGeom>
+          <a:noFill/>
+          <a:ln w="0">
+            <a:noFill/>
+          </a:ln>
+        </p:spPr>
+        <p:txBody>
+          <a:bodyPr lIns="0" rIns="0" tIns="0" bIns="0" anchor="t">
+            <a:noAutofit/>
+          </a:bodyPr>
+          <a:p>
+            <a:endParaRPr b="0" lang="en-US" sz="2000" spc="-1" strike="noStrike">
+              <a:latin typeface="Arial"/>
+            </a:endParaRPr>
+          </a:p>
+        </p:txBody>
+      </p:sp>
+      <p:sp>
+        <p:nvSpPr>
+          <p:cNvPr id="145" name="PlaceHolder 3"/>
           <p:cNvSpPr>
             <a:spLocks noGrp="1"/>
           </p:cNvSpPr>
@@ -689,18 +677,18 @@
         <p:spPr>
           <a:xfrm>
             <a:off x="3884760" y="8685360"/>
-            <a:ext cx="2971440" cy="458280"/>
-          </a:xfrm>
-          <a:prstGeom prst="rect">
-            <a:avLst/>
-          </a:prstGeom>
-          <a:noFill/>
-          <a:ln w="0">
-            <a:noFill/>
-          </a:ln>
-        </p:spPr>
-        <p:txBody>
-          <a:bodyPr anchor="b">
+            <a:ext cx="2971080" cy="457920"/>
+          </a:xfrm>
+          <a:prstGeom prst="rect">
+            <a:avLst/>
+          </a:prstGeom>
+          <a:noFill/>
+          <a:ln w="0">
+            <a:noFill/>
+          </a:ln>
+        </p:spPr>
+        <p:txBody>
+          <a:bodyPr lIns="0" rIns="0" tIns="0" bIns="0" anchor="b">
             <a:noAutofit/>
           </a:bodyPr>
           <a:lstStyle>
@@ -721,13 +709,13 @@
               </a:lnSpc>
               <a:buNone/>
             </a:pPr>
-            <a:fld id="{E6F9A4F3-37D3-460C-AD59-E2FCD08C5C03}" type="slidenum">
+            <a:fld id="{089A6E80-412E-45AD-9400-63B96F47A8CB}" type="slidenum">
               <a:rPr b="0" lang="ru-RU" sz="1200" spc="-1" strike="noStrike">
                 <a:latin typeface="Times New Roman"/>
               </a:rPr>
-              <a:t>&lt;номер&gt;</a:t>
+              <a:t>&lt;number&gt;</a:t>
             </a:fld>
-            <a:endParaRPr b="0" lang="ru-RU" sz="1200" spc="-1" strike="noStrike">
+            <a:endParaRPr b="0" lang="en-US" sz="1200" spc="-1" strike="noStrike">
               <a:latin typeface="Times New Roman"/>
             </a:endParaRPr>
           </a:p>
@@ -762,7 +750,7 @@
             <a:spLocks noGrp="1"/>
           </p:cNvSpPr>
           <p:nvPr>
-            <p:ph type="ftr" idx="2"/>
+            <p:ph type="ftr" idx="1"/>
           </p:nvPr>
         </p:nvSpPr>
         <p:spPr/>
@@ -782,14 +770,14 @@
             <a:spLocks noGrp="1"/>
           </p:cNvSpPr>
           <p:nvPr>
-            <p:ph type="sldNum" idx="3"/>
+            <p:ph type="sldNum" idx="2"/>
           </p:nvPr>
         </p:nvSpPr>
         <p:spPr/>
         <p:txBody>
           <a:bodyPr/>
           <a:p>
-            <a:fld id="{0875D555-5009-4E6C-A736-AD52B39AF7B1}" type="slidenum">
+            <a:fld id="{FFB1AF3B-067F-47B1-AB30-0B3AA0384604}" type="slidenum">
               <a:t>&lt;#&gt;</a:t>
             </a:fld>
           </a:p>
@@ -802,7 +790,7 @@
             <a:spLocks noGrp="1"/>
           </p:cNvSpPr>
           <p:nvPr>
-            <p:ph type="dt" idx="1"/>
+            <p:ph type="dt" idx="3"/>
           </p:nvPr>
         </p:nvSpPr>
         <p:spPr/>
@@ -810,7 +798,7 @@
           <a:bodyPr/>
           <a:p>
             <a:r>
-              <a:rPr lang="ru-RU"/>
+              <a:rPr lang="en-US"/>
               <a:t/>
             </a:r>
           </a:p>
@@ -851,7 +839,7 @@
         <p:spPr>
           <a:xfrm>
             <a:off x="1143000" y="841680"/>
-            <a:ext cx="6857640" cy="1790280"/>
+            <a:ext cx="6857280" cy="1789920"/>
           </a:xfrm>
           <a:prstGeom prst="rect">
             <a:avLst/>
@@ -866,11 +854,11 @@
             <a:noAutofit/>
           </a:bodyPr>
           <a:p>
-            <a:endParaRPr b="0" lang="en-US" sz="1800" spc="-1" strike="noStrike">
-              <a:solidFill>
-                <a:srgbClr val="000000"/>
-              </a:solidFill>
-              <a:latin typeface="Calibri"/>
+            <a:pPr algn="ctr">
+              <a:buNone/>
+            </a:pPr>
+            <a:endParaRPr b="0" lang="en-US" sz="4400" spc="-1" strike="noStrike">
+              <a:latin typeface="Arial"/>
             </a:endParaRPr>
           </a:p>
         </p:txBody>
@@ -903,20 +891,8 @@
             <a:normAutofit/>
           </a:bodyPr>
           <a:p>
-            <a:pPr>
-              <a:lnSpc>
-                <a:spcPct val="90000"/>
-              </a:lnSpc>
-              <a:spcBef>
-                <a:spcPts val="1417"/>
-              </a:spcBef>
-              <a:buNone/>
-            </a:pPr>
-            <a:endParaRPr b="0" lang="en-US" sz="2100" spc="-1" strike="noStrike">
-              <a:solidFill>
-                <a:srgbClr val="000000"/>
-              </a:solidFill>
-              <a:latin typeface="Calibri"/>
+            <a:endParaRPr b="0" lang="en-US" sz="3200" spc="-1" strike="noStrike">
+              <a:latin typeface="Arial"/>
             </a:endParaRPr>
           </a:p>
         </p:txBody>
@@ -949,20 +925,8 @@
             <a:normAutofit/>
           </a:bodyPr>
           <a:p>
-            <a:pPr>
-              <a:lnSpc>
-                <a:spcPct val="90000"/>
-              </a:lnSpc>
-              <a:spcBef>
-                <a:spcPts val="1417"/>
-              </a:spcBef>
-              <a:buNone/>
-            </a:pPr>
-            <a:endParaRPr b="0" lang="en-US" sz="2100" spc="-1" strike="noStrike">
-              <a:solidFill>
-                <a:srgbClr val="000000"/>
-              </a:solidFill>
-              <a:latin typeface="Calibri"/>
+            <a:endParaRPr b="0" lang="en-US" sz="3200" spc="-1" strike="noStrike">
+              <a:latin typeface="Arial"/>
             </a:endParaRPr>
           </a:p>
         </p:txBody>
@@ -974,7 +938,7 @@
             <a:spLocks noGrp="1"/>
           </p:cNvSpPr>
           <p:nvPr>
-            <p:ph type="ftr" idx="2"/>
+            <p:ph type="ftr" idx="1"/>
           </p:nvPr>
         </p:nvSpPr>
         <p:spPr/>
@@ -994,14 +958,14 @@
             <a:spLocks noGrp="1"/>
           </p:cNvSpPr>
           <p:nvPr>
-            <p:ph type="sldNum" idx="3"/>
+            <p:ph type="sldNum" idx="2"/>
           </p:nvPr>
         </p:nvSpPr>
         <p:spPr/>
         <p:txBody>
           <a:bodyPr/>
           <a:p>
-            <a:fld id="{0ACC3B32-3D39-463F-A00F-7F8EF1C28AFA}" type="slidenum">
+            <a:fld id="{BBCEBE2E-0524-4D17-B7FE-D9B8EDAEE7D8}" type="slidenum">
               <a:t>&lt;#&gt;</a:t>
             </a:fld>
           </a:p>
@@ -1014,7 +978,7 @@
             <a:spLocks noGrp="1"/>
           </p:cNvSpPr>
           <p:nvPr>
-            <p:ph type="dt" idx="1"/>
+            <p:ph type="dt" idx="3"/>
           </p:nvPr>
         </p:nvSpPr>
         <p:spPr/>
@@ -1022,7 +986,7 @@
           <a:bodyPr/>
           <a:p>
             <a:r>
-              <a:rPr lang="ru-RU"/>
+              <a:rPr lang="en-US"/>
               <a:t/>
             </a:r>
           </a:p>
@@ -1063,7 +1027,7 @@
         <p:spPr>
           <a:xfrm>
             <a:off x="1143000" y="841680"/>
-            <a:ext cx="6857640" cy="1790280"/>
+            <a:ext cx="6857280" cy="1789920"/>
           </a:xfrm>
           <a:prstGeom prst="rect">
             <a:avLst/>
@@ -1078,11 +1042,11 @@
             <a:noAutofit/>
           </a:bodyPr>
           <a:p>
-            <a:endParaRPr b="0" lang="en-US" sz="1800" spc="-1" strike="noStrike">
-              <a:solidFill>
-                <a:srgbClr val="000000"/>
-              </a:solidFill>
-              <a:latin typeface="Calibri"/>
+            <a:pPr algn="ctr">
+              <a:buNone/>
+            </a:pPr>
+            <a:endParaRPr b="0" lang="en-US" sz="4400" spc="-1" strike="noStrike">
+              <a:latin typeface="Arial"/>
             </a:endParaRPr>
           </a:p>
         </p:txBody>
@@ -1115,20 +1079,8 @@
             <a:normAutofit/>
           </a:bodyPr>
           <a:p>
-            <a:pPr>
-              <a:lnSpc>
-                <a:spcPct val="90000"/>
-              </a:lnSpc>
-              <a:spcBef>
-                <a:spcPts val="1417"/>
-              </a:spcBef>
-              <a:buNone/>
-            </a:pPr>
-            <a:endParaRPr b="0" lang="en-US" sz="2100" spc="-1" strike="noStrike">
-              <a:solidFill>
-                <a:srgbClr val="000000"/>
-              </a:solidFill>
-              <a:latin typeface="Calibri"/>
+            <a:endParaRPr b="0" lang="en-US" sz="3200" spc="-1" strike="noStrike">
+              <a:latin typeface="Arial"/>
             </a:endParaRPr>
           </a:p>
         </p:txBody>
@@ -1161,20 +1113,8 @@
             <a:normAutofit/>
           </a:bodyPr>
           <a:p>
-            <a:pPr>
-              <a:lnSpc>
-                <a:spcPct val="90000"/>
-              </a:lnSpc>
-              <a:spcBef>
-                <a:spcPts val="1417"/>
-              </a:spcBef>
-              <a:buNone/>
-            </a:pPr>
-            <a:endParaRPr b="0" lang="en-US" sz="2100" spc="-1" strike="noStrike">
-              <a:solidFill>
-                <a:srgbClr val="000000"/>
-              </a:solidFill>
-              <a:latin typeface="Calibri"/>
+            <a:endParaRPr b="0" lang="en-US" sz="3200" spc="-1" strike="noStrike">
+              <a:latin typeface="Arial"/>
             </a:endParaRPr>
           </a:p>
         </p:txBody>
@@ -1207,20 +1147,8 @@
             <a:normAutofit/>
           </a:bodyPr>
           <a:p>
-            <a:pPr>
-              <a:lnSpc>
-                <a:spcPct val="90000"/>
-              </a:lnSpc>
-              <a:spcBef>
-                <a:spcPts val="1417"/>
-              </a:spcBef>
-              <a:buNone/>
-            </a:pPr>
-            <a:endParaRPr b="0" lang="en-US" sz="2100" spc="-1" strike="noStrike">
-              <a:solidFill>
-                <a:srgbClr val="000000"/>
-              </a:solidFill>
-              <a:latin typeface="Calibri"/>
+            <a:endParaRPr b="0" lang="en-US" sz="3200" spc="-1" strike="noStrike">
+              <a:latin typeface="Arial"/>
             </a:endParaRPr>
           </a:p>
         </p:txBody>
@@ -1253,20 +1181,8 @@
             <a:normAutofit/>
           </a:bodyPr>
           <a:p>
-            <a:pPr>
-              <a:lnSpc>
-                <a:spcPct val="90000"/>
-              </a:lnSpc>
-              <a:spcBef>
-                <a:spcPts val="1417"/>
-              </a:spcBef>
-              <a:buNone/>
-            </a:pPr>
-            <a:endParaRPr b="0" lang="en-US" sz="2100" spc="-1" strike="noStrike">
-              <a:solidFill>
-                <a:srgbClr val="000000"/>
-              </a:solidFill>
-              <a:latin typeface="Calibri"/>
+            <a:endParaRPr b="0" lang="en-US" sz="3200" spc="-1" strike="noStrike">
+              <a:latin typeface="Arial"/>
             </a:endParaRPr>
           </a:p>
         </p:txBody>
@@ -1278,7 +1194,7 @@
             <a:spLocks noGrp="1"/>
           </p:cNvSpPr>
           <p:nvPr>
-            <p:ph type="ftr" idx="2"/>
+            <p:ph type="ftr" idx="1"/>
           </p:nvPr>
         </p:nvSpPr>
         <p:spPr/>
@@ -1298,14 +1214,14 @@
             <a:spLocks noGrp="1"/>
           </p:cNvSpPr>
           <p:nvPr>
-            <p:ph type="sldNum" idx="3"/>
+            <p:ph type="sldNum" idx="2"/>
           </p:nvPr>
         </p:nvSpPr>
         <p:spPr/>
         <p:txBody>
           <a:bodyPr/>
           <a:p>
-            <a:fld id="{2DBEE3C5-F27B-48B7-8D2E-6AC8C5436EFB}" type="slidenum">
+            <a:fld id="{97491E35-336F-4A70-A5E3-653AE9FF5C59}" type="slidenum">
               <a:t>&lt;#&gt;</a:t>
             </a:fld>
           </a:p>
@@ -1318,7 +1234,7 @@
             <a:spLocks noGrp="1"/>
           </p:cNvSpPr>
           <p:nvPr>
-            <p:ph type="dt" idx="1"/>
+            <p:ph type="dt" idx="3"/>
           </p:nvPr>
         </p:nvSpPr>
         <p:spPr/>
@@ -1326,7 +1242,7 @@
           <a:bodyPr/>
           <a:p>
             <a:r>
-              <a:rPr lang="ru-RU"/>
+              <a:rPr lang="en-US"/>
               <a:t/>
             </a:r>
           </a:p>
@@ -1367,7 +1283,7 @@
         <p:spPr>
           <a:xfrm>
             <a:off x="1143000" y="841680"/>
-            <a:ext cx="6857640" cy="1790280"/>
+            <a:ext cx="6857280" cy="1789920"/>
           </a:xfrm>
           <a:prstGeom prst="rect">
             <a:avLst/>
@@ -1382,11 +1298,11 @@
             <a:noAutofit/>
           </a:bodyPr>
           <a:p>
-            <a:endParaRPr b="0" lang="en-US" sz="1800" spc="-1" strike="noStrike">
-              <a:solidFill>
-                <a:srgbClr val="000000"/>
-              </a:solidFill>
-              <a:latin typeface="Calibri"/>
+            <a:pPr algn="ctr">
+              <a:buNone/>
+            </a:pPr>
+            <a:endParaRPr b="0" lang="en-US" sz="4400" spc="-1" strike="noStrike">
+              <a:latin typeface="Arial"/>
             </a:endParaRPr>
           </a:p>
         </p:txBody>
@@ -1419,20 +1335,8 @@
             <a:normAutofit/>
           </a:bodyPr>
           <a:p>
-            <a:pPr>
-              <a:lnSpc>
-                <a:spcPct val="90000"/>
-              </a:lnSpc>
-              <a:spcBef>
-                <a:spcPts val="1417"/>
-              </a:spcBef>
-              <a:buNone/>
-            </a:pPr>
-            <a:endParaRPr b="0" lang="en-US" sz="2100" spc="-1" strike="noStrike">
-              <a:solidFill>
-                <a:srgbClr val="000000"/>
-              </a:solidFill>
-              <a:latin typeface="Calibri"/>
+            <a:endParaRPr b="0" lang="en-US" sz="3200" spc="-1" strike="noStrike">
+              <a:latin typeface="Arial"/>
             </a:endParaRPr>
           </a:p>
         </p:txBody>
@@ -1465,20 +1369,8 @@
             <a:normAutofit/>
           </a:bodyPr>
           <a:p>
-            <a:pPr>
-              <a:lnSpc>
-                <a:spcPct val="90000"/>
-              </a:lnSpc>
-              <a:spcBef>
-                <a:spcPts val="1417"/>
-              </a:spcBef>
-              <a:buNone/>
-            </a:pPr>
-            <a:endParaRPr b="0" lang="en-US" sz="2100" spc="-1" strike="noStrike">
-              <a:solidFill>
-                <a:srgbClr val="000000"/>
-              </a:solidFill>
-              <a:latin typeface="Calibri"/>
+            <a:endParaRPr b="0" lang="en-US" sz="3200" spc="-1" strike="noStrike">
+              <a:latin typeface="Arial"/>
             </a:endParaRPr>
           </a:p>
         </p:txBody>
@@ -1511,20 +1403,8 @@
             <a:normAutofit/>
           </a:bodyPr>
           <a:p>
-            <a:pPr>
-              <a:lnSpc>
-                <a:spcPct val="90000"/>
-              </a:lnSpc>
-              <a:spcBef>
-                <a:spcPts val="1417"/>
-              </a:spcBef>
-              <a:buNone/>
-            </a:pPr>
-            <a:endParaRPr b="0" lang="en-US" sz="2100" spc="-1" strike="noStrike">
-              <a:solidFill>
-                <a:srgbClr val="000000"/>
-              </a:solidFill>
-              <a:latin typeface="Calibri"/>
+            <a:endParaRPr b="0" lang="en-US" sz="3200" spc="-1" strike="noStrike">
+              <a:latin typeface="Arial"/>
             </a:endParaRPr>
           </a:p>
         </p:txBody>
@@ -1557,20 +1437,8 @@
             <a:normAutofit/>
           </a:bodyPr>
           <a:p>
-            <a:pPr>
-              <a:lnSpc>
-                <a:spcPct val="90000"/>
-              </a:lnSpc>
-              <a:spcBef>
-                <a:spcPts val="1417"/>
-              </a:spcBef>
-              <a:buNone/>
-            </a:pPr>
-            <a:endParaRPr b="0" lang="en-US" sz="2100" spc="-1" strike="noStrike">
-              <a:solidFill>
-                <a:srgbClr val="000000"/>
-              </a:solidFill>
-              <a:latin typeface="Calibri"/>
+            <a:endParaRPr b="0" lang="en-US" sz="3200" spc="-1" strike="noStrike">
+              <a:latin typeface="Arial"/>
             </a:endParaRPr>
           </a:p>
         </p:txBody>
@@ -1603,20 +1471,8 @@
             <a:normAutofit/>
           </a:bodyPr>
           <a:p>
-            <a:pPr>
-              <a:lnSpc>
-                <a:spcPct val="90000"/>
-              </a:lnSpc>
-              <a:spcBef>
-                <a:spcPts val="1417"/>
-              </a:spcBef>
-              <a:buNone/>
-            </a:pPr>
-            <a:endParaRPr b="0" lang="en-US" sz="2100" spc="-1" strike="noStrike">
-              <a:solidFill>
-                <a:srgbClr val="000000"/>
-              </a:solidFill>
-              <a:latin typeface="Calibri"/>
+            <a:endParaRPr b="0" lang="en-US" sz="3200" spc="-1" strike="noStrike">
+              <a:latin typeface="Arial"/>
             </a:endParaRPr>
           </a:p>
         </p:txBody>
@@ -1649,20 +1505,8 @@
             <a:normAutofit/>
           </a:bodyPr>
           <a:p>
-            <a:pPr>
-              <a:lnSpc>
-                <a:spcPct val="90000"/>
-              </a:lnSpc>
-              <a:spcBef>
-                <a:spcPts val="1417"/>
-              </a:spcBef>
-              <a:buNone/>
-            </a:pPr>
-            <a:endParaRPr b="0" lang="en-US" sz="2100" spc="-1" strike="noStrike">
-              <a:solidFill>
-                <a:srgbClr val="000000"/>
-              </a:solidFill>
-              <a:latin typeface="Calibri"/>
+            <a:endParaRPr b="0" lang="en-US" sz="3200" spc="-1" strike="noStrike">
+              <a:latin typeface="Arial"/>
             </a:endParaRPr>
           </a:p>
         </p:txBody>
@@ -1674,7 +1518,7 @@
             <a:spLocks noGrp="1"/>
           </p:cNvSpPr>
           <p:nvPr>
-            <p:ph type="ftr" idx="2"/>
+            <p:ph type="ftr" idx="1"/>
           </p:nvPr>
         </p:nvSpPr>
         <p:spPr/>
@@ -1694,14 +1538,14 @@
             <a:spLocks noGrp="1"/>
           </p:cNvSpPr>
           <p:nvPr>
-            <p:ph type="sldNum" idx="3"/>
+            <p:ph type="sldNum" idx="2"/>
           </p:nvPr>
         </p:nvSpPr>
         <p:spPr/>
         <p:txBody>
           <a:bodyPr/>
           <a:p>
-            <a:fld id="{DB6A60D3-637F-4D48-AB39-DFDB6D9613A6}" type="slidenum">
+            <a:fld id="{2EC17C1C-25F6-4D12-8D97-0A574AD839A0}" type="slidenum">
               <a:t>&lt;#&gt;</a:t>
             </a:fld>
           </a:p>
@@ -1714,7 +1558,7 @@
             <a:spLocks noGrp="1"/>
           </p:cNvSpPr>
           <p:nvPr>
-            <p:ph type="dt" idx="1"/>
+            <p:ph type="dt" idx="3"/>
           </p:nvPr>
         </p:nvSpPr>
         <p:spPr/>
@@ -1722,7 +1566,7 @@
           <a:bodyPr/>
           <a:p>
             <a:r>
-              <a:rPr lang="ru-RU"/>
+              <a:rPr lang="en-US"/>
               <a:t/>
             </a:r>
           </a:p>
@@ -1763,7 +1607,7 @@
         <p:spPr>
           <a:xfrm>
             <a:off x="1143000" y="841680"/>
-            <a:ext cx="6857640" cy="1790280"/>
+            <a:ext cx="6857280" cy="1789920"/>
           </a:xfrm>
           <a:prstGeom prst="rect">
             <a:avLst/>
@@ -1778,11 +1622,11 @@
             <a:noAutofit/>
           </a:bodyPr>
           <a:p>
-            <a:endParaRPr b="0" lang="en-US" sz="1800" spc="-1" strike="noStrike">
-              <a:solidFill>
-                <a:srgbClr val="000000"/>
-              </a:solidFill>
-              <a:latin typeface="Calibri"/>
+            <a:pPr algn="ctr">
+              <a:buNone/>
+            </a:pPr>
+            <a:endParaRPr b="0" lang="en-US" sz="4400" spc="-1" strike="noStrike">
+              <a:latin typeface="Arial"/>
             </a:endParaRPr>
           </a:p>
         </p:txBody>
@@ -1818,7 +1662,7 @@
             <a:pPr algn="ctr">
               <a:buNone/>
             </a:pPr>
-            <a:endParaRPr b="0" lang="ru-RU" sz="3200" spc="-1" strike="noStrike">
+            <a:endParaRPr b="0" lang="en-US" sz="3200" spc="-1" strike="noStrike">
               <a:latin typeface="Arial"/>
             </a:endParaRPr>
           </a:p>
@@ -1831,7 +1675,7 @@
             <a:spLocks noGrp="1"/>
           </p:cNvSpPr>
           <p:nvPr>
-            <p:ph type="ftr" idx="2"/>
+            <p:ph type="ftr" idx="1"/>
           </p:nvPr>
         </p:nvSpPr>
         <p:spPr/>
@@ -1851,14 +1695,14 @@
             <a:spLocks noGrp="1"/>
           </p:cNvSpPr>
           <p:nvPr>
-            <p:ph type="sldNum" idx="3"/>
+            <p:ph type="sldNum" idx="2"/>
           </p:nvPr>
         </p:nvSpPr>
         <p:spPr/>
         <p:txBody>
           <a:bodyPr/>
           <a:p>
-            <a:fld id="{9BF9956D-922D-4DF0-81F4-A1DD0020CBC6}" type="slidenum">
+            <a:fld id="{DB1AB569-C866-4686-B407-EB09A1E3ED5D}" type="slidenum">
               <a:t>&lt;#&gt;</a:t>
             </a:fld>
           </a:p>
@@ -1871,7 +1715,7 @@
             <a:spLocks noGrp="1"/>
           </p:cNvSpPr>
           <p:nvPr>
-            <p:ph type="dt" idx="1"/>
+            <p:ph type="dt" idx="3"/>
           </p:nvPr>
         </p:nvSpPr>
         <p:spPr/>
@@ -1879,7 +1723,7 @@
           <a:bodyPr/>
           <a:p>
             <a:r>
-              <a:rPr lang="ru-RU"/>
+              <a:rPr lang="en-US"/>
               <a:t/>
             </a:r>
           </a:p>
@@ -1920,7 +1764,7 @@
         <p:spPr>
           <a:xfrm>
             <a:off x="1143000" y="841680"/>
-            <a:ext cx="6857640" cy="1790280"/>
+            <a:ext cx="6857280" cy="1789920"/>
           </a:xfrm>
           <a:prstGeom prst="rect">
             <a:avLst/>
@@ -1935,11 +1779,11 @@
             <a:noAutofit/>
           </a:bodyPr>
           <a:p>
-            <a:endParaRPr b="0" lang="en-US" sz="1800" spc="-1" strike="noStrike">
-              <a:solidFill>
-                <a:srgbClr val="000000"/>
-              </a:solidFill>
-              <a:latin typeface="Calibri"/>
+            <a:pPr algn="ctr">
+              <a:buNone/>
+            </a:pPr>
+            <a:endParaRPr b="0" lang="en-US" sz="4400" spc="-1" strike="noStrike">
+              <a:latin typeface="Arial"/>
             </a:endParaRPr>
           </a:p>
         </p:txBody>
@@ -1972,20 +1816,8 @@
             <a:normAutofit/>
           </a:bodyPr>
           <a:p>
-            <a:pPr>
-              <a:lnSpc>
-                <a:spcPct val="90000"/>
-              </a:lnSpc>
-              <a:spcBef>
-                <a:spcPts val="1417"/>
-              </a:spcBef>
-              <a:buNone/>
-            </a:pPr>
-            <a:endParaRPr b="0" lang="en-US" sz="2100" spc="-1" strike="noStrike">
-              <a:solidFill>
-                <a:srgbClr val="000000"/>
-              </a:solidFill>
-              <a:latin typeface="Calibri"/>
+            <a:endParaRPr b="0" lang="en-US" sz="3200" spc="-1" strike="noStrike">
+              <a:latin typeface="Arial"/>
             </a:endParaRPr>
           </a:p>
         </p:txBody>
@@ -1997,7 +1829,7 @@
             <a:spLocks noGrp="1"/>
           </p:cNvSpPr>
           <p:nvPr>
-            <p:ph type="ftr" idx="2"/>
+            <p:ph type="ftr" idx="1"/>
           </p:nvPr>
         </p:nvSpPr>
         <p:spPr/>
@@ -2017,14 +1849,14 @@
             <a:spLocks noGrp="1"/>
           </p:cNvSpPr>
           <p:nvPr>
-            <p:ph type="sldNum" idx="3"/>
+            <p:ph type="sldNum" idx="2"/>
           </p:nvPr>
         </p:nvSpPr>
         <p:spPr/>
         <p:txBody>
           <a:bodyPr/>
           <a:p>
-            <a:fld id="{5AE27B2A-C2BD-4E05-BD40-543C2E6373C1}" type="slidenum">
+            <a:fld id="{E54D23E1-1DA3-4316-B67A-D7E9C244F7FD}" type="slidenum">
               <a:t>&lt;#&gt;</a:t>
             </a:fld>
           </a:p>
@@ -2037,7 +1869,7 @@
             <a:spLocks noGrp="1"/>
           </p:cNvSpPr>
           <p:nvPr>
-            <p:ph type="dt" idx="1"/>
+            <p:ph type="dt" idx="3"/>
           </p:nvPr>
         </p:nvSpPr>
         <p:spPr/>
@@ -2045,7 +1877,7 @@
           <a:bodyPr/>
           <a:p>
             <a:r>
-              <a:rPr lang="ru-RU"/>
+              <a:rPr lang="en-US"/>
               <a:t/>
             </a:r>
           </a:p>
@@ -2086,7 +1918,7 @@
         <p:spPr>
           <a:xfrm>
             <a:off x="1143000" y="841680"/>
-            <a:ext cx="6857640" cy="1790280"/>
+            <a:ext cx="6857280" cy="1789920"/>
           </a:xfrm>
           <a:prstGeom prst="rect">
             <a:avLst/>
@@ -2101,11 +1933,11 @@
             <a:noAutofit/>
           </a:bodyPr>
           <a:p>
-            <a:endParaRPr b="0" lang="en-US" sz="1800" spc="-1" strike="noStrike">
-              <a:solidFill>
-                <a:srgbClr val="000000"/>
-              </a:solidFill>
-              <a:latin typeface="Calibri"/>
+            <a:pPr algn="ctr">
+              <a:buNone/>
+            </a:pPr>
+            <a:endParaRPr b="0" lang="en-US" sz="4400" spc="-1" strike="noStrike">
+              <a:latin typeface="Arial"/>
             </a:endParaRPr>
           </a:p>
         </p:txBody>
@@ -2138,20 +1970,8 @@
             <a:normAutofit/>
           </a:bodyPr>
           <a:p>
-            <a:pPr>
-              <a:lnSpc>
-                <a:spcPct val="90000"/>
-              </a:lnSpc>
-              <a:spcBef>
-                <a:spcPts val="1417"/>
-              </a:spcBef>
-              <a:buNone/>
-            </a:pPr>
-            <a:endParaRPr b="0" lang="en-US" sz="2100" spc="-1" strike="noStrike">
-              <a:solidFill>
-                <a:srgbClr val="000000"/>
-              </a:solidFill>
-              <a:latin typeface="Calibri"/>
+            <a:endParaRPr b="0" lang="en-US" sz="3200" spc="-1" strike="noStrike">
+              <a:latin typeface="Arial"/>
             </a:endParaRPr>
           </a:p>
         </p:txBody>
@@ -2184,20 +2004,8 @@
             <a:normAutofit/>
           </a:bodyPr>
           <a:p>
-            <a:pPr>
-              <a:lnSpc>
-                <a:spcPct val="90000"/>
-              </a:lnSpc>
-              <a:spcBef>
-                <a:spcPts val="1417"/>
-              </a:spcBef>
-              <a:buNone/>
-            </a:pPr>
-            <a:endParaRPr b="0" lang="en-US" sz="2100" spc="-1" strike="noStrike">
-              <a:solidFill>
-                <a:srgbClr val="000000"/>
-              </a:solidFill>
-              <a:latin typeface="Calibri"/>
+            <a:endParaRPr b="0" lang="en-US" sz="3200" spc="-1" strike="noStrike">
+              <a:latin typeface="Arial"/>
             </a:endParaRPr>
           </a:p>
         </p:txBody>
@@ -2209,7 +2017,7 @@
             <a:spLocks noGrp="1"/>
           </p:cNvSpPr>
           <p:nvPr>
-            <p:ph type="ftr" idx="2"/>
+            <p:ph type="ftr" idx="1"/>
           </p:nvPr>
         </p:nvSpPr>
         <p:spPr/>
@@ -2229,14 +2037,14 @@
             <a:spLocks noGrp="1"/>
           </p:cNvSpPr>
           <p:nvPr>
-            <p:ph type="sldNum" idx="3"/>
+            <p:ph type="sldNum" idx="2"/>
           </p:nvPr>
         </p:nvSpPr>
         <p:spPr/>
         <p:txBody>
           <a:bodyPr/>
           <a:p>
-            <a:fld id="{F799AFAB-B733-4A18-967F-32C5B4C8DA04}" type="slidenum">
+            <a:fld id="{5C59F82B-8EE7-4CFE-814C-D8C14D0928EE}" type="slidenum">
               <a:t>&lt;#&gt;</a:t>
             </a:fld>
           </a:p>
@@ -2249,7 +2057,7 @@
             <a:spLocks noGrp="1"/>
           </p:cNvSpPr>
           <p:nvPr>
-            <p:ph type="dt" idx="1"/>
+            <p:ph type="dt" idx="3"/>
           </p:nvPr>
         </p:nvSpPr>
         <p:spPr/>
@@ -2257,7 +2065,7 @@
           <a:bodyPr/>
           <a:p>
             <a:r>
-              <a:rPr lang="ru-RU"/>
+              <a:rPr lang="en-US"/>
               <a:t/>
             </a:r>
           </a:p>
@@ -2298,7 +2106,7 @@
         <p:spPr>
           <a:xfrm>
             <a:off x="1143000" y="841680"/>
-            <a:ext cx="6857640" cy="1790280"/>
+            <a:ext cx="6857280" cy="1789920"/>
           </a:xfrm>
           <a:prstGeom prst="rect">
             <a:avLst/>
@@ -2313,11 +2121,11 @@
             <a:noAutofit/>
           </a:bodyPr>
           <a:p>
-            <a:endParaRPr b="0" lang="en-US" sz="1800" spc="-1" strike="noStrike">
-              <a:solidFill>
-                <a:srgbClr val="000000"/>
-              </a:solidFill>
-              <a:latin typeface="Calibri"/>
+            <a:pPr algn="ctr">
+              <a:buNone/>
+            </a:pPr>
+            <a:endParaRPr b="0" lang="en-US" sz="4400" spc="-1" strike="noStrike">
+              <a:latin typeface="Arial"/>
             </a:endParaRPr>
           </a:p>
         </p:txBody>
@@ -2329,7 +2137,7 @@
             <a:spLocks noGrp="1"/>
           </p:cNvSpPr>
           <p:nvPr>
-            <p:ph type="ftr" idx="2"/>
+            <p:ph type="ftr" idx="1"/>
           </p:nvPr>
         </p:nvSpPr>
         <p:spPr/>
@@ -2349,14 +2157,14 @@
             <a:spLocks noGrp="1"/>
           </p:cNvSpPr>
           <p:nvPr>
-            <p:ph type="sldNum" idx="3"/>
+            <p:ph type="sldNum" idx="2"/>
           </p:nvPr>
         </p:nvSpPr>
         <p:spPr/>
         <p:txBody>
           <a:bodyPr/>
           <a:p>
-            <a:fld id="{5B294F5E-B6B0-424C-A344-FBAC9351D27A}" type="slidenum">
+            <a:fld id="{AFB19974-DABC-4F80-86B3-55C191B2533A}" type="slidenum">
               <a:t>&lt;#&gt;</a:t>
             </a:fld>
           </a:p>
@@ -2369,7 +2177,7 @@
             <a:spLocks noGrp="1"/>
           </p:cNvSpPr>
           <p:nvPr>
-            <p:ph type="dt" idx="1"/>
+            <p:ph type="dt" idx="3"/>
           </p:nvPr>
         </p:nvSpPr>
         <p:spPr/>
@@ -2377,7 +2185,7 @@
           <a:bodyPr/>
           <a:p>
             <a:r>
-              <a:rPr lang="ru-RU"/>
+              <a:rPr lang="en-US"/>
               <a:t/>
             </a:r>
           </a:p>
@@ -2418,7 +2226,7 @@
         <p:spPr>
           <a:xfrm>
             <a:off x="1143000" y="841680"/>
-            <a:ext cx="6857640" cy="8299800"/>
+            <a:ext cx="6857280" cy="8298360"/>
           </a:xfrm>
           <a:prstGeom prst="rect">
             <a:avLst/>
@@ -2436,7 +2244,7 @@
             <a:pPr algn="ctr">
               <a:buNone/>
             </a:pPr>
-            <a:endParaRPr b="0" lang="ru-RU" sz="3200" spc="-1" strike="noStrike">
+            <a:endParaRPr b="0" lang="en-US" sz="3200" spc="-1" strike="noStrike">
               <a:latin typeface="Arial"/>
             </a:endParaRPr>
           </a:p>
@@ -2449,7 +2257,7 @@
             <a:spLocks noGrp="1"/>
           </p:cNvSpPr>
           <p:nvPr>
-            <p:ph type="ftr" idx="2"/>
+            <p:ph type="ftr" idx="1"/>
           </p:nvPr>
         </p:nvSpPr>
         <p:spPr/>
@@ -2469,14 +2277,14 @@
             <a:spLocks noGrp="1"/>
           </p:cNvSpPr>
           <p:nvPr>
-            <p:ph type="sldNum" idx="3"/>
+            <p:ph type="sldNum" idx="2"/>
           </p:nvPr>
         </p:nvSpPr>
         <p:spPr/>
         <p:txBody>
           <a:bodyPr/>
           <a:p>
-            <a:fld id="{38A2D2FA-CE09-4D9F-A029-E9F51220BD20}" type="slidenum">
+            <a:fld id="{411B20E4-303F-47AC-886F-E8FE4153588A}" type="slidenum">
               <a:t>&lt;#&gt;</a:t>
             </a:fld>
           </a:p>
@@ -2489,7 +2297,7 @@
             <a:spLocks noGrp="1"/>
           </p:cNvSpPr>
           <p:nvPr>
-            <p:ph type="dt" idx="1"/>
+            <p:ph type="dt" idx="3"/>
           </p:nvPr>
         </p:nvSpPr>
         <p:spPr/>
@@ -2497,7 +2305,7 @@
           <a:bodyPr/>
           <a:p>
             <a:r>
-              <a:rPr lang="ru-RU"/>
+              <a:rPr lang="en-US"/>
               <a:t/>
             </a:r>
           </a:p>
@@ -2538,7 +2346,7 @@
         <p:spPr>
           <a:xfrm>
             <a:off x="1143000" y="841680"/>
-            <a:ext cx="6857640" cy="1790280"/>
+            <a:ext cx="6857280" cy="1789920"/>
           </a:xfrm>
           <a:prstGeom prst="rect">
             <a:avLst/>
@@ -2553,11 +2361,11 @@
             <a:noAutofit/>
           </a:bodyPr>
           <a:p>
-            <a:endParaRPr b="0" lang="en-US" sz="1800" spc="-1" strike="noStrike">
-              <a:solidFill>
-                <a:srgbClr val="000000"/>
-              </a:solidFill>
-              <a:latin typeface="Calibri"/>
+            <a:pPr algn="ctr">
+              <a:buNone/>
+            </a:pPr>
+            <a:endParaRPr b="0" lang="en-US" sz="4400" spc="-1" strike="noStrike">
+              <a:latin typeface="Arial"/>
             </a:endParaRPr>
           </a:p>
         </p:txBody>
@@ -2590,20 +2398,8 @@
             <a:normAutofit/>
           </a:bodyPr>
           <a:p>
-            <a:pPr>
-              <a:lnSpc>
-                <a:spcPct val="90000"/>
-              </a:lnSpc>
-              <a:spcBef>
-                <a:spcPts val="1417"/>
-              </a:spcBef>
-              <a:buNone/>
-            </a:pPr>
-            <a:endParaRPr b="0" lang="en-US" sz="2100" spc="-1" strike="noStrike">
-              <a:solidFill>
-                <a:srgbClr val="000000"/>
-              </a:solidFill>
-              <a:latin typeface="Calibri"/>
+            <a:endParaRPr b="0" lang="en-US" sz="3200" spc="-1" strike="noStrike">
+              <a:latin typeface="Arial"/>
             </a:endParaRPr>
           </a:p>
         </p:txBody>
@@ -2636,20 +2432,8 @@
             <a:normAutofit/>
           </a:bodyPr>
           <a:p>
-            <a:pPr>
-              <a:lnSpc>
-                <a:spcPct val="90000"/>
-              </a:lnSpc>
-              <a:spcBef>
-                <a:spcPts val="1417"/>
-              </a:spcBef>
-              <a:buNone/>
-            </a:pPr>
-            <a:endParaRPr b="0" lang="en-US" sz="2100" spc="-1" strike="noStrike">
-              <a:solidFill>
-                <a:srgbClr val="000000"/>
-              </a:solidFill>
-              <a:latin typeface="Calibri"/>
+            <a:endParaRPr b="0" lang="en-US" sz="3200" spc="-1" strike="noStrike">
+              <a:latin typeface="Arial"/>
             </a:endParaRPr>
           </a:p>
         </p:txBody>
@@ -2682,20 +2466,8 @@
             <a:normAutofit/>
           </a:bodyPr>
           <a:p>
-            <a:pPr>
-              <a:lnSpc>
-                <a:spcPct val="90000"/>
-              </a:lnSpc>
-              <a:spcBef>
-                <a:spcPts val="1417"/>
-              </a:spcBef>
-              <a:buNone/>
-            </a:pPr>
-            <a:endParaRPr b="0" lang="en-US" sz="2100" spc="-1" strike="noStrike">
-              <a:solidFill>
-                <a:srgbClr val="000000"/>
-              </a:solidFill>
-              <a:latin typeface="Calibri"/>
+            <a:endParaRPr b="0" lang="en-US" sz="3200" spc="-1" strike="noStrike">
+              <a:latin typeface="Arial"/>
             </a:endParaRPr>
           </a:p>
         </p:txBody>
@@ -2707,7 +2479,7 @@
             <a:spLocks noGrp="1"/>
           </p:cNvSpPr>
           <p:nvPr>
-            <p:ph type="ftr" idx="2"/>
+            <p:ph type="ftr" idx="1"/>
           </p:nvPr>
         </p:nvSpPr>
         <p:spPr/>
@@ -2727,14 +2499,14 @@
             <a:spLocks noGrp="1"/>
           </p:cNvSpPr>
           <p:nvPr>
-            <p:ph type="sldNum" idx="3"/>
+            <p:ph type="sldNum" idx="2"/>
           </p:nvPr>
         </p:nvSpPr>
         <p:spPr/>
         <p:txBody>
           <a:bodyPr/>
           <a:p>
-            <a:fld id="{A16DB274-8C15-476F-BFC0-279870612924}" type="slidenum">
+            <a:fld id="{B9C94E57-21DD-4D1C-8543-8D978ABD5D8C}" type="slidenum">
               <a:t>&lt;#&gt;</a:t>
             </a:fld>
           </a:p>
@@ -2747,7 +2519,7 @@
             <a:spLocks noGrp="1"/>
           </p:cNvSpPr>
           <p:nvPr>
-            <p:ph type="dt" idx="1"/>
+            <p:ph type="dt" idx="3"/>
           </p:nvPr>
         </p:nvSpPr>
         <p:spPr/>
@@ -2755,7 +2527,7 @@
           <a:bodyPr/>
           <a:p>
             <a:r>
-              <a:rPr lang="ru-RU"/>
+              <a:rPr lang="en-US"/>
               <a:t/>
             </a:r>
           </a:p>
@@ -2796,7 +2568,7 @@
         <p:spPr>
           <a:xfrm>
             <a:off x="1143000" y="841680"/>
-            <a:ext cx="6857640" cy="1790280"/>
+            <a:ext cx="6857280" cy="1789920"/>
           </a:xfrm>
           <a:prstGeom prst="rect">
             <a:avLst/>
@@ -2811,11 +2583,11 @@
             <a:noAutofit/>
           </a:bodyPr>
           <a:p>
-            <a:endParaRPr b="0" lang="en-US" sz="1800" spc="-1" strike="noStrike">
-              <a:solidFill>
-                <a:srgbClr val="000000"/>
-              </a:solidFill>
-              <a:latin typeface="Calibri"/>
+            <a:pPr algn="ctr">
+              <a:buNone/>
+            </a:pPr>
+            <a:endParaRPr b="0" lang="en-US" sz="4400" spc="-1" strike="noStrike">
+              <a:latin typeface="Arial"/>
             </a:endParaRPr>
           </a:p>
         </p:txBody>
@@ -2848,20 +2620,8 @@
             <a:normAutofit/>
           </a:bodyPr>
           <a:p>
-            <a:pPr>
-              <a:lnSpc>
-                <a:spcPct val="90000"/>
-              </a:lnSpc>
-              <a:spcBef>
-                <a:spcPts val="1417"/>
-              </a:spcBef>
-              <a:buNone/>
-            </a:pPr>
-            <a:endParaRPr b="0" lang="en-US" sz="2100" spc="-1" strike="noStrike">
-              <a:solidFill>
-                <a:srgbClr val="000000"/>
-              </a:solidFill>
-              <a:latin typeface="Calibri"/>
+            <a:endParaRPr b="0" lang="en-US" sz="3200" spc="-1" strike="noStrike">
+              <a:latin typeface="Arial"/>
             </a:endParaRPr>
           </a:p>
         </p:txBody>
@@ -2894,20 +2654,8 @@
             <a:normAutofit/>
           </a:bodyPr>
           <a:p>
-            <a:pPr>
-              <a:lnSpc>
-                <a:spcPct val="90000"/>
-              </a:lnSpc>
-              <a:spcBef>
-                <a:spcPts val="1417"/>
-              </a:spcBef>
-              <a:buNone/>
-            </a:pPr>
-            <a:endParaRPr b="0" lang="en-US" sz="2100" spc="-1" strike="noStrike">
-              <a:solidFill>
-                <a:srgbClr val="000000"/>
-              </a:solidFill>
-              <a:latin typeface="Calibri"/>
+            <a:endParaRPr b="0" lang="en-US" sz="3200" spc="-1" strike="noStrike">
+              <a:latin typeface="Arial"/>
             </a:endParaRPr>
           </a:p>
         </p:txBody>
@@ -2940,20 +2688,8 @@
             <a:normAutofit/>
           </a:bodyPr>
           <a:p>
-            <a:pPr>
-              <a:lnSpc>
-                <a:spcPct val="90000"/>
-              </a:lnSpc>
-              <a:spcBef>
-                <a:spcPts val="1417"/>
-              </a:spcBef>
-              <a:buNone/>
-            </a:pPr>
-            <a:endParaRPr b="0" lang="en-US" sz="2100" spc="-1" strike="noStrike">
-              <a:solidFill>
-                <a:srgbClr val="000000"/>
-              </a:solidFill>
-              <a:latin typeface="Calibri"/>
+            <a:endParaRPr b="0" lang="en-US" sz="3200" spc="-1" strike="noStrike">
+              <a:latin typeface="Arial"/>
             </a:endParaRPr>
           </a:p>
         </p:txBody>
@@ -2965,7 +2701,7 @@
             <a:spLocks noGrp="1"/>
           </p:cNvSpPr>
           <p:nvPr>
-            <p:ph type="ftr" idx="2"/>
+            <p:ph type="ftr" idx="1"/>
           </p:nvPr>
         </p:nvSpPr>
         <p:spPr/>
@@ -2985,14 +2721,14 @@
             <a:spLocks noGrp="1"/>
           </p:cNvSpPr>
           <p:nvPr>
-            <p:ph type="sldNum" idx="3"/>
+            <p:ph type="sldNum" idx="2"/>
           </p:nvPr>
         </p:nvSpPr>
         <p:spPr/>
         <p:txBody>
           <a:bodyPr/>
           <a:p>
-            <a:fld id="{4D6262BA-635C-42F4-BB30-2E21082D56F2}" type="slidenum">
+            <a:fld id="{0B623144-CB94-497D-AD86-BF60BA0DAC8E}" type="slidenum">
               <a:t>&lt;#&gt;</a:t>
             </a:fld>
           </a:p>
@@ -3005,7 +2741,7 @@
             <a:spLocks noGrp="1"/>
           </p:cNvSpPr>
           <p:nvPr>
-            <p:ph type="dt" idx="1"/>
+            <p:ph type="dt" idx="3"/>
           </p:nvPr>
         </p:nvSpPr>
         <p:spPr/>
@@ -3013,7 +2749,7 @@
           <a:bodyPr/>
           <a:p>
             <a:r>
-              <a:rPr lang="ru-RU"/>
+              <a:rPr lang="en-US"/>
               <a:t/>
             </a:r>
           </a:p>
@@ -3054,7 +2790,7 @@
         <p:spPr>
           <a:xfrm>
             <a:off x="1143000" y="841680"/>
-            <a:ext cx="6857640" cy="1790280"/>
+            <a:ext cx="6857280" cy="1789920"/>
           </a:xfrm>
           <a:prstGeom prst="rect">
             <a:avLst/>
@@ -3069,11 +2805,11 @@
             <a:noAutofit/>
           </a:bodyPr>
           <a:p>
-            <a:endParaRPr b="0" lang="en-US" sz="1800" spc="-1" strike="noStrike">
-              <a:solidFill>
-                <a:srgbClr val="000000"/>
-              </a:solidFill>
-              <a:latin typeface="Calibri"/>
+            <a:pPr algn="ctr">
+              <a:buNone/>
+            </a:pPr>
+            <a:endParaRPr b="0" lang="en-US" sz="4400" spc="-1" strike="noStrike">
+              <a:latin typeface="Arial"/>
             </a:endParaRPr>
           </a:p>
         </p:txBody>
@@ -3106,20 +2842,8 @@
             <a:normAutofit/>
           </a:bodyPr>
           <a:p>
-            <a:pPr>
-              <a:lnSpc>
-                <a:spcPct val="90000"/>
-              </a:lnSpc>
-              <a:spcBef>
-                <a:spcPts val="1417"/>
-              </a:spcBef>
-              <a:buNone/>
-            </a:pPr>
-            <a:endParaRPr b="0" lang="en-US" sz="2100" spc="-1" strike="noStrike">
-              <a:solidFill>
-                <a:srgbClr val="000000"/>
-              </a:solidFill>
-              <a:latin typeface="Calibri"/>
+            <a:endParaRPr b="0" lang="en-US" sz="3200" spc="-1" strike="noStrike">
+              <a:latin typeface="Arial"/>
             </a:endParaRPr>
           </a:p>
         </p:txBody>
@@ -3152,20 +2876,8 @@
             <a:normAutofit/>
           </a:bodyPr>
           <a:p>
-            <a:pPr>
-              <a:lnSpc>
-                <a:spcPct val="90000"/>
-              </a:lnSpc>
-              <a:spcBef>
-                <a:spcPts val="1417"/>
-              </a:spcBef>
-              <a:buNone/>
-            </a:pPr>
-            <a:endParaRPr b="0" lang="en-US" sz="2100" spc="-1" strike="noStrike">
-              <a:solidFill>
-                <a:srgbClr val="000000"/>
-              </a:solidFill>
-              <a:latin typeface="Calibri"/>
+            <a:endParaRPr b="0" lang="en-US" sz="3200" spc="-1" strike="noStrike">
+              <a:latin typeface="Arial"/>
             </a:endParaRPr>
           </a:p>
         </p:txBody>
@@ -3198,20 +2910,8 @@
             <a:normAutofit/>
           </a:bodyPr>
           <a:p>
-            <a:pPr>
-              <a:lnSpc>
-                <a:spcPct val="90000"/>
-              </a:lnSpc>
-              <a:spcBef>
-                <a:spcPts val="1417"/>
-              </a:spcBef>
-              <a:buNone/>
-            </a:pPr>
-            <a:endParaRPr b="0" lang="en-US" sz="2100" spc="-1" strike="noStrike">
-              <a:solidFill>
-                <a:srgbClr val="000000"/>
-              </a:solidFill>
-              <a:latin typeface="Calibri"/>
+            <a:endParaRPr b="0" lang="en-US" sz="3200" spc="-1" strike="noStrike">
+              <a:latin typeface="Arial"/>
             </a:endParaRPr>
           </a:p>
         </p:txBody>
@@ -3223,7 +2923,7 @@
             <a:spLocks noGrp="1"/>
           </p:cNvSpPr>
           <p:nvPr>
-            <p:ph type="ftr" idx="2"/>
+            <p:ph type="ftr" idx="1"/>
           </p:nvPr>
         </p:nvSpPr>
         <p:spPr/>
@@ -3243,14 +2943,14 @@
             <a:spLocks noGrp="1"/>
           </p:cNvSpPr>
           <p:nvPr>
-            <p:ph type="sldNum" idx="3"/>
+            <p:ph type="sldNum" idx="2"/>
           </p:nvPr>
         </p:nvSpPr>
         <p:spPr/>
         <p:txBody>
           <a:bodyPr/>
           <a:p>
-            <a:fld id="{BD9B006B-654C-4B12-8C5C-B28310872FFD}" type="slidenum">
+            <a:fld id="{BB2D40A8-4AC9-4A4A-AF4F-A58E7AF7EEA7}" type="slidenum">
               <a:t>&lt;#&gt;</a:t>
             </a:fld>
           </a:p>
@@ -3263,7 +2963,7 @@
             <a:spLocks noGrp="1"/>
           </p:cNvSpPr>
           <p:nvPr>
-            <p:ph type="dt" idx="1"/>
+            <p:ph type="dt" idx="3"/>
           </p:nvPr>
         </p:nvSpPr>
         <p:spPr/>
@@ -3271,7 +2971,7 @@
           <a:bodyPr/>
           <a:p>
             <a:r>
-              <a:rPr lang="ru-RU"/>
+              <a:rPr lang="en-US"/>
               <a:t/>
             </a:r>
           </a:p>
@@ -3319,41 +3019,29 @@
         <p:spPr>
           <a:xfrm>
             <a:off x="1143000" y="841680"/>
-            <a:ext cx="6857640" cy="1790280"/>
-          </a:xfrm>
-          <a:prstGeom prst="rect">
-            <a:avLst/>
-          </a:prstGeom>
-          <a:noFill/>
-          <a:ln w="0">
-            <a:noFill/>
-          </a:ln>
-        </p:spPr>
-        <p:txBody>
-          <a:bodyPr anchor="b">
-            <a:noAutofit/>
-          </a:bodyPr>
-          <a:p>
-            <a:pPr algn="ctr">
-              <a:lnSpc>
-                <a:spcPct val="90000"/>
-              </a:lnSpc>
-              <a:buNone/>
-            </a:pPr>
-            <a:r>
-              <a:rPr b="0" lang="ru-RU" sz="4500" spc="-1" strike="noStrike">
-                <a:solidFill>
-                  <a:srgbClr val="000000"/>
-                </a:solidFill>
-                <a:latin typeface="Calibri Light"/>
-              </a:rPr>
-              <a:t>Образец заголовка</a:t>
-            </a:r>
-            <a:endParaRPr b="0" lang="en-US" sz="4500" spc="-1" strike="noStrike">
-              <a:solidFill>
-                <a:srgbClr val="000000"/>
-              </a:solidFill>
-              <a:latin typeface="Calibri"/>
+            <a:ext cx="6857280" cy="1789920"/>
+          </a:xfrm>
+          <a:prstGeom prst="rect">
+            <a:avLst/>
+          </a:prstGeom>
+          <a:noFill/>
+          <a:ln w="0">
+            <a:noFill/>
+          </a:ln>
+        </p:spPr>
+        <p:txBody>
+          <a:bodyPr lIns="0" rIns="0" tIns="0" bIns="0" anchor="ctr">
+            <a:noAutofit/>
+          </a:bodyPr>
+          <a:p>
+            <a:r>
+              <a:rPr b="0" lang="en-US" sz="1800" spc="-1" strike="noStrike">
+                <a:latin typeface="Arial"/>
+              </a:rPr>
+              <a:t>Click to edit the title text format</a:t>
+            </a:r>
+            <a:endParaRPr b="0" lang="en-US" sz="1800" spc="-1" strike="noStrike">
+              <a:latin typeface="Arial"/>
             </a:endParaRPr>
           </a:p>
         </p:txBody>
@@ -3365,91 +3053,31 @@
             <a:spLocks noGrp="1"/>
           </p:cNvSpPr>
           <p:nvPr>
-            <p:ph type="dt" idx="1"/>
-          </p:nvPr>
-        </p:nvSpPr>
-        <p:spPr>
-          <a:xfrm>
-            <a:off x="628560" y="4767120"/>
-            <a:ext cx="2057040" cy="273600"/>
-          </a:xfrm>
-          <a:prstGeom prst="rect">
-            <a:avLst/>
-          </a:prstGeom>
-          <a:noFill/>
-          <a:ln w="0">
-            <a:noFill/>
-          </a:ln>
-        </p:spPr>
-        <p:txBody>
-          <a:bodyPr anchor="ctr">
+            <p:ph type="ftr" idx="1"/>
+          </p:nvPr>
+        </p:nvSpPr>
+        <p:spPr>
+          <a:xfrm>
+            <a:off x="3029040" y="4767120"/>
+            <a:ext cx="3085560" cy="273240"/>
+          </a:xfrm>
+          <a:prstGeom prst="rect">
+            <a:avLst/>
+          </a:prstGeom>
+          <a:noFill/>
+          <a:ln w="0">
+            <a:noFill/>
+          </a:ln>
+        </p:spPr>
+        <p:txBody>
+          <a:bodyPr lIns="90000" rIns="90000" tIns="45000" bIns="45000" anchor="ctr">
             <a:noAutofit/>
           </a:bodyPr>
           <a:lstStyle>
-            <a:lvl1pPr>
+            <a:lvl1pPr algn="ctr">
               <a:lnSpc>
                 <a:spcPct val="100000"/>
               </a:lnSpc>
-              <a:buNone/>
-              <a:defRPr b="0" lang="en-US" sz="900" spc="-1" strike="noStrike">
-                <a:solidFill>
-                  <a:srgbClr val="8b8b8b"/>
-                </a:solidFill>
-                <a:latin typeface="Calibri"/>
-              </a:defRPr>
-            </a:lvl1pPr>
-          </a:lstStyle>
-          <a:p>
-            <a:pPr>
-              <a:lnSpc>
-                <a:spcPct val="100000"/>
-              </a:lnSpc>
-              <a:buNone/>
-            </a:pPr>
-            <a:r>
-              <a:rPr b="0" lang="en-US" sz="900" spc="-1" strike="noStrike">
-                <a:solidFill>
-                  <a:srgbClr val="8b8b8b"/>
-                </a:solidFill>
-                <a:latin typeface="Calibri"/>
-              </a:rPr>
-              <a:t>&lt;дата/время&gt;</a:t>
-            </a:r>
-            <a:endParaRPr b="0" lang="ru-RU" sz="900" spc="-1" strike="noStrike">
-              <a:latin typeface="Times New Roman"/>
-            </a:endParaRPr>
-          </a:p>
-        </p:txBody>
-      </p:sp>
-      <p:sp>
-        <p:nvSpPr>
-          <p:cNvPr id="2" name="PlaceHolder 3"/>
-          <p:cNvSpPr>
-            <a:spLocks noGrp="1"/>
-          </p:cNvSpPr>
-          <p:nvPr>
-            <p:ph type="ftr" idx="2"/>
-          </p:nvPr>
-        </p:nvSpPr>
-        <p:spPr>
-          <a:xfrm>
-            <a:off x="3029040" y="4767120"/>
-            <a:ext cx="3085920" cy="273600"/>
-          </a:xfrm>
-          <a:prstGeom prst="rect">
-            <a:avLst/>
-          </a:prstGeom>
-          <a:noFill/>
-          <a:ln w="0">
-            <a:noFill/>
-          </a:ln>
-        </p:spPr>
-        <p:txBody>
-          <a:bodyPr anchor="ctr">
-            <a:noAutofit/>
-          </a:bodyPr>
-          <a:lstStyle>
-            <a:lvl1pPr algn="ctr">
               <a:buNone/>
               <a:defRPr b="0" lang="ru-RU" sz="1400" spc="-1" strike="noStrike">
                 <a:latin typeface="Times New Roman"/>
@@ -3458,15 +3086,18 @@
           </a:lstStyle>
           <a:p>
             <a:pPr algn="ctr">
+              <a:lnSpc>
+                <a:spcPct val="100000"/>
+              </a:lnSpc>
               <a:buNone/>
             </a:pPr>
             <a:r>
               <a:rPr b="0" lang="ru-RU" sz="1400" spc="-1" strike="noStrike">
                 <a:latin typeface="Times New Roman"/>
               </a:rPr>
-              <a:t>&lt;нижний колонтитул&gt;</a:t>
-            </a:r>
-            <a:endParaRPr b="0" lang="ru-RU" sz="1400" spc="-1" strike="noStrike">
+              <a:t>&lt;footer&gt;</a:t>
+            </a:r>
+            <a:endParaRPr b="0" lang="en-US" sz="1400" spc="-1" strike="noStrike">
               <a:latin typeface="Times New Roman"/>
             </a:endParaRPr>
           </a:p>
@@ -3474,29 +3105,29 @@
       </p:sp>
       <p:sp>
         <p:nvSpPr>
-          <p:cNvPr id="3" name="PlaceHolder 4"/>
-          <p:cNvSpPr>
-            <a:spLocks noGrp="1"/>
-          </p:cNvSpPr>
-          <p:nvPr>
-            <p:ph type="sldNum" idx="3"/>
+          <p:cNvPr id="2" name="PlaceHolder 3"/>
+          <p:cNvSpPr>
+            <a:spLocks noGrp="1"/>
+          </p:cNvSpPr>
+          <p:nvPr>
+            <p:ph type="sldNum" idx="2"/>
           </p:nvPr>
         </p:nvSpPr>
         <p:spPr>
           <a:xfrm>
             <a:off x="6458040" y="4767120"/>
-            <a:ext cx="2057040" cy="273600"/>
-          </a:xfrm>
-          <a:prstGeom prst="rect">
-            <a:avLst/>
-          </a:prstGeom>
-          <a:noFill/>
-          <a:ln w="0">
-            <a:noFill/>
-          </a:ln>
-        </p:spPr>
-        <p:txBody>
-          <a:bodyPr anchor="ctr">
+            <a:ext cx="2056680" cy="273240"/>
+          </a:xfrm>
+          <a:prstGeom prst="rect">
+            <a:avLst/>
+          </a:prstGeom>
+          <a:noFill/>
+          <a:ln w="0">
+            <a:noFill/>
+          </a:ln>
+        </p:spPr>
+        <p:txBody>
+          <a:bodyPr lIns="90000" rIns="90000" tIns="45000" bIns="45000" anchor="ctr">
             <a:noAutofit/>
           </a:bodyPr>
           <a:lstStyle>
@@ -3520,16 +3151,63 @@
               </a:lnSpc>
               <a:buNone/>
             </a:pPr>
-            <a:fld id="{FA3B6148-1A49-4492-8F92-9509C7DC23B7}" type="slidenum">
+            <a:fld id="{09D275E3-BD40-4875-8DF1-449B540895FA}" type="slidenum">
               <a:rPr b="0" lang="en-US" sz="900" spc="-1" strike="noStrike">
                 <a:solidFill>
                   <a:srgbClr val="8b8b8b"/>
                 </a:solidFill>
                 <a:latin typeface="Calibri"/>
               </a:rPr>
-              <a:t>&lt;номер&gt;</a:t>
+              <a:t>&lt;number&gt;</a:t>
             </a:fld>
-            <a:endParaRPr b="0" lang="ru-RU" sz="900" spc="-1" strike="noStrike">
+            <a:endParaRPr b="0" lang="en-US" sz="900" spc="-1" strike="noStrike">
+              <a:latin typeface="Times New Roman"/>
+            </a:endParaRPr>
+          </a:p>
+        </p:txBody>
+      </p:sp>
+      <p:sp>
+        <p:nvSpPr>
+          <p:cNvPr id="3" name="PlaceHolder 4"/>
+          <p:cNvSpPr>
+            <a:spLocks noGrp="1"/>
+          </p:cNvSpPr>
+          <p:nvPr>
+            <p:ph type="dt" idx="3"/>
+          </p:nvPr>
+        </p:nvSpPr>
+        <p:spPr>
+          <a:xfrm>
+            <a:off x="628560" y="4767120"/>
+            <a:ext cx="2056680" cy="273240"/>
+          </a:xfrm>
+          <a:prstGeom prst="rect">
+            <a:avLst/>
+          </a:prstGeom>
+          <a:noFill/>
+          <a:ln w="0">
+            <a:noFill/>
+          </a:ln>
+        </p:spPr>
+        <p:txBody>
+          <a:bodyPr lIns="90000" rIns="90000" tIns="45000" bIns="45000" anchor="ctr">
+            <a:noAutofit/>
+          </a:bodyPr>
+          <a:lstStyle>
+            <a:lvl1pPr>
+              <a:defRPr b="0" lang="en-US" sz="1400" spc="-1" strike="noStrike">
+                <a:latin typeface="Times New Roman"/>
+              </a:defRPr>
+            </a:lvl1pPr>
+          </a:lstStyle>
+          <a:p>
+            <a:r>
+              <a:rPr b="0" lang="en-US" sz="1400" spc="-1" strike="noStrike">
+                <a:latin typeface="Times New Roman"/>
+              </a:rPr>
+              <a:t>&lt;date/time&gt;</a:t>
+            </a:r>
+            <a:endParaRPr b="0" lang="en-US" sz="1400" spc="-1" strike="noStrike">
               <a:latin typeface="Times New Roman"/>
             </a:endParaRPr>
           </a:p>
@@ -3564,9 +3242,6 @@
           </a:bodyPr>
           <a:p>
             <a:pPr marL="432000" indent="-324000">
-              <a:lnSpc>
-                <a:spcPct val="90000"/>
-              </a:lnSpc>
               <a:spcBef>
                 <a:spcPts val="1417"/>
               </a:spcBef>
@@ -3578,26 +3253,17 @@
               <a:buChar char=""/>
             </a:pPr>
             <a:r>
-              <a:rPr b="0" lang="en-US" sz="2100" spc="-1" strike="noStrike">
-                <a:solidFill>
-                  <a:srgbClr val="000000"/>
-                </a:solidFill>
-                <a:latin typeface="Calibri"/>
-              </a:rPr>
-              <a:t>Для правки структуры щёлкните мышью</a:t>
-            </a:r>
-            <a:endParaRPr b="0" lang="en-US" sz="2100" spc="-1" strike="noStrike">
-              <a:solidFill>
-                <a:srgbClr val="000000"/>
-              </a:solidFill>
-              <a:latin typeface="Calibri"/>
+              <a:rPr b="0" lang="en-US" sz="3200" spc="-1" strike="noStrike">
+                <a:latin typeface="Arial"/>
+              </a:rPr>
+              <a:t>Click to edit the outline text format</a:t>
+            </a:r>
+            <a:endParaRPr b="0" lang="en-US" sz="3200" spc="-1" strike="noStrike">
+              <a:latin typeface="Arial"/>
             </a:endParaRPr>
           </a:p>
           <a:p>
             <a:pPr lvl="1" marL="864000" indent="-324000">
-              <a:lnSpc>
-                <a:spcPct val="90000"/>
-              </a:lnSpc>
               <a:spcBef>
                 <a:spcPts val="1134"/>
               </a:spcBef>
@@ -3609,26 +3275,17 @@
               <a:buChar char=""/>
             </a:pPr>
             <a:r>
-              <a:rPr b="0" lang="en-US" sz="1500" spc="-1" strike="noStrike">
-                <a:solidFill>
-                  <a:srgbClr val="000000"/>
-                </a:solidFill>
-                <a:latin typeface="Calibri"/>
-              </a:rPr>
-              <a:t>Второй уровень структуры</a:t>
-            </a:r>
-            <a:endParaRPr b="0" lang="en-US" sz="1500" spc="-1" strike="noStrike">
-              <a:solidFill>
-                <a:srgbClr val="000000"/>
-              </a:solidFill>
-              <a:latin typeface="Calibri"/>
+              <a:rPr b="0" lang="en-US" sz="2800" spc="-1" strike="noStrike">
+                <a:latin typeface="Arial"/>
+              </a:rPr>
+              <a:t>Second Outline Level</a:t>
+            </a:r>
+            <a:endParaRPr b="0" lang="en-US" sz="2800" spc="-1" strike="noStrike">
+              <a:latin typeface="Arial"/>
             </a:endParaRPr>
           </a:p>
           <a:p>
             <a:pPr lvl="2" marL="1296000" indent="-288000">
-              <a:lnSpc>
-                <a:spcPct val="90000"/>
-              </a:lnSpc>
               <a:spcBef>
                 <a:spcPts val="850"/>
               </a:spcBef>
@@ -3640,26 +3297,17 @@
               <a:buChar char=""/>
             </a:pPr>
             <a:r>
-              <a:rPr b="0" lang="en-US" sz="1350" spc="-1" strike="noStrike">
-                <a:solidFill>
-                  <a:srgbClr val="000000"/>
-                </a:solidFill>
-                <a:latin typeface="Calibri"/>
-              </a:rPr>
-              <a:t>Третий уровень структуры</a:t>
-            </a:r>
-            <a:endParaRPr b="0" lang="en-US" sz="1350" spc="-1" strike="noStrike">
-              <a:solidFill>
-                <a:srgbClr val="000000"/>
-              </a:solidFill>
-              <a:latin typeface="Calibri"/>
+              <a:rPr b="0" lang="en-US" sz="2400" spc="-1" strike="noStrike">
+                <a:latin typeface="Arial"/>
+              </a:rPr>
+              <a:t>Third Outline Level</a:t>
+            </a:r>
+            <a:endParaRPr b="0" lang="en-US" sz="2400" spc="-1" strike="noStrike">
+              <a:latin typeface="Arial"/>
             </a:endParaRPr>
           </a:p>
           <a:p>
             <a:pPr lvl="3" marL="1728000" indent="-216000">
-              <a:lnSpc>
-                <a:spcPct val="90000"/>
-              </a:lnSpc>
               <a:spcBef>
                 <a:spcPts val="567"/>
               </a:spcBef>
@@ -3671,26 +3319,17 @@
               <a:buChar char=""/>
             </a:pPr>
             <a:r>
-              <a:rPr b="0" lang="en-US" sz="1350" spc="-1" strike="noStrike">
-                <a:solidFill>
-                  <a:srgbClr val="000000"/>
-                </a:solidFill>
-                <a:latin typeface="Calibri"/>
-              </a:rPr>
-              <a:t>Четвёртый уровень структуры</a:t>
-            </a:r>
-            <a:endParaRPr b="0" lang="en-US" sz="1350" spc="-1" strike="noStrike">
-              <a:solidFill>
-                <a:srgbClr val="000000"/>
-              </a:solidFill>
-              <a:latin typeface="Calibri"/>
+              <a:rPr b="0" lang="en-US" sz="2000" spc="-1" strike="noStrike">
+                <a:latin typeface="Arial"/>
+              </a:rPr>
+              <a:t>Fourth Outline Level</a:t>
+            </a:r>
+            <a:endParaRPr b="0" lang="en-US" sz="2000" spc="-1" strike="noStrike">
+              <a:latin typeface="Arial"/>
             </a:endParaRPr>
           </a:p>
           <a:p>
             <a:pPr lvl="4" marL="2160000" indent="-216000">
-              <a:lnSpc>
-                <a:spcPct val="90000"/>
-              </a:lnSpc>
               <a:spcBef>
                 <a:spcPts val="283"/>
               </a:spcBef>
@@ -3703,25 +3342,16 @@
             </a:pPr>
             <a:r>
               <a:rPr b="0" lang="en-US" sz="2000" spc="-1" strike="noStrike">
-                <a:solidFill>
-                  <a:srgbClr val="000000"/>
-                </a:solidFill>
-                <a:latin typeface="Calibri"/>
-              </a:rPr>
-              <a:t>Пятый уровень структуры</a:t>
+                <a:latin typeface="Arial"/>
+              </a:rPr>
+              <a:t>Fifth Outline Level</a:t>
             </a:r>
             <a:endParaRPr b="0" lang="en-US" sz="2000" spc="-1" strike="noStrike">
-              <a:solidFill>
-                <a:srgbClr val="000000"/>
-              </a:solidFill>
-              <a:latin typeface="Calibri"/>
+              <a:latin typeface="Arial"/>
             </a:endParaRPr>
           </a:p>
           <a:p>
             <a:pPr lvl="5" marL="2592000" indent="-216000">
-              <a:lnSpc>
-                <a:spcPct val="90000"/>
-              </a:lnSpc>
               <a:spcBef>
                 <a:spcPts val="283"/>
               </a:spcBef>
@@ -3734,25 +3364,16 @@
             </a:pPr>
             <a:r>
               <a:rPr b="0" lang="en-US" sz="2000" spc="-1" strike="noStrike">
-                <a:solidFill>
-                  <a:srgbClr val="000000"/>
-                </a:solidFill>
-                <a:latin typeface="Calibri"/>
-              </a:rPr>
-              <a:t>Шестой уровень структуры</a:t>
+                <a:latin typeface="Arial"/>
+              </a:rPr>
+              <a:t>Sixth Outline Level</a:t>
             </a:r>
             <a:endParaRPr b="0" lang="en-US" sz="2000" spc="-1" strike="noStrike">
-              <a:solidFill>
-                <a:srgbClr val="000000"/>
-              </a:solidFill>
-              <a:latin typeface="Calibri"/>
+              <a:latin typeface="Arial"/>
             </a:endParaRPr>
           </a:p>
           <a:p>
             <a:pPr lvl="6" marL="3024000" indent="-216000">
-              <a:lnSpc>
-                <a:spcPct val="90000"/>
-              </a:lnSpc>
               <a:spcBef>
                 <a:spcPts val="283"/>
               </a:spcBef>
@@ -3765,18 +3386,12 @@
             </a:pPr>
             <a:r>
               <a:rPr b="0" lang="en-US" sz="2000" spc="-1" strike="noStrike">
-                <a:solidFill>
-                  <a:srgbClr val="000000"/>
-                </a:solidFill>
-                <a:latin typeface="Calibri"/>
-              </a:rPr>
-              <a:t>Седьмой уровень структуры</a:t>
+                <a:latin typeface="Arial"/>
+              </a:rPr>
+              <a:t>Seventh Outline Level</a:t>
             </a:r>
             <a:endParaRPr b="0" lang="en-US" sz="2000" spc="-1" strike="noStrike">
-              <a:solidFill>
-                <a:srgbClr val="000000"/>
-              </a:solidFill>
-              <a:latin typeface="Calibri"/>
+              <a:latin typeface="Arial"/>
             </a:endParaRPr>
           </a:p>
         </p:txBody>
@@ -3834,7 +3449,7 @@
         <p:spPr>
           <a:xfrm>
             <a:off x="186840" y="185400"/>
-            <a:ext cx="8770320" cy="4758120"/>
+            <a:ext cx="8769960" cy="4757760"/>
           </a:xfrm>
           <a:prstGeom prst="roundRect">
             <a:avLst>
@@ -3872,7 +3487,7 @@
         <p:spPr>
           <a:xfrm>
             <a:off x="460080" y="658080"/>
-            <a:ext cx="8469000" cy="3306960"/>
+            <a:ext cx="8468640" cy="3306600"/>
           </a:xfrm>
           <a:prstGeom prst="rect">
             <a:avLst/>
@@ -3909,58 +3524,7 @@
               </a:rPr>
               <a:t>TITLE</a:t>
             </a:r>
-            <a:endParaRPr b="0" lang="ru-RU" sz="5400" spc="-1" strike="noStrike">
-              <a:latin typeface="Arial"/>
-            </a:endParaRPr>
-          </a:p>
-        </p:txBody>
-      </p:sp>
-      <p:sp>
-        <p:nvSpPr>
-          <p:cNvPr id="49" name="Прямоугольник 5"/>
-          <p:cNvSpPr/>
-          <p:nvPr/>
-        </p:nvSpPr>
-        <p:spPr>
-          <a:xfrm>
-            <a:off x="460080" y="358920"/>
-            <a:ext cx="2999160" cy="269640"/>
-          </a:xfrm>
-          <a:prstGeom prst="rect">
-            <a:avLst/>
-          </a:prstGeom>
-          <a:noFill/>
-          <a:ln w="0">
-            <a:noFill/>
-          </a:ln>
-        </p:spPr>
-        <p:style>
-          <a:lnRef idx="0"/>
-          <a:fillRef idx="0"/>
-          <a:effectRef idx="0"/>
-          <a:fontRef idx="minor"/>
-        </p:style>
-        <p:txBody>
-          <a:bodyPr lIns="90000" rIns="90000" tIns="45000" bIns="45000" anchor="t">
-            <a:noAutofit/>
-          </a:bodyPr>
-          <a:p>
-            <a:pPr>
-              <a:lnSpc>
-                <a:spcPts val="1650"/>
-              </a:lnSpc>
-              <a:buNone/>
-            </a:pPr>
-            <a:r>
-              <a:rPr b="0" lang="ru-RU" sz="1400" spc="-1" strike="noStrike">
-                <a:solidFill>
-                  <a:srgbClr val="f2f2f2"/>
-                </a:solidFill>
-                <a:latin typeface="Arial"/>
-              </a:rPr>
-              <a:t>Тема:</a:t>
-            </a:r>
-            <a:endParaRPr b="0" lang="ru-RU" sz="1400" spc="-1" strike="noStrike">
+            <a:endParaRPr b="0" lang="en-US" sz="5400" spc="-1" strike="noStrike">
               <a:latin typeface="Arial"/>
             </a:endParaRPr>
           </a:p>
@@ -4005,14 +3569,14 @@
       </p:grpSpPr>
       <p:sp>
         <p:nvSpPr>
-          <p:cNvPr id="50" name="Прямоугольник со скругленными углами 3"/>
+          <p:cNvPr id="49" name="Прямоугольник со скругленными углами 3"/>
           <p:cNvSpPr/>
           <p:nvPr/>
         </p:nvSpPr>
         <p:spPr>
           <a:xfrm>
             <a:off x="3507480" y="0"/>
-            <a:ext cx="5636160" cy="5143320"/>
+            <a:ext cx="5635800" cy="5142960"/>
           </a:xfrm>
           <a:prstGeom prst="roundRect">
             <a:avLst>
@@ -4061,22 +3625,22 @@
               </a:rPr>
               <a:t>PIC</a:t>
             </a:r>
-            <a:endParaRPr b="0" lang="ru-RU" sz="1800" spc="-1" strike="noStrike">
-              <a:latin typeface="Arial"/>
-            </a:endParaRPr>
-          </a:p>
-        </p:txBody>
-      </p:sp>
-      <p:sp>
-        <p:nvSpPr>
-          <p:cNvPr id="51" name="Прямоугольник: скругленные углы 2"/>
+            <a:endParaRPr b="0" lang="en-US" sz="1800" spc="-1" strike="noStrike">
+              <a:latin typeface="Arial"/>
+            </a:endParaRPr>
+          </a:p>
+        </p:txBody>
+      </p:sp>
+      <p:sp>
+        <p:nvSpPr>
+          <p:cNvPr id="50" name="Прямоугольник: скругленные углы 2"/>
           <p:cNvSpPr/>
           <p:nvPr/>
         </p:nvSpPr>
         <p:spPr>
           <a:xfrm>
             <a:off x="3722040" y="257040"/>
-            <a:ext cx="5186160" cy="4650120"/>
+            <a:ext cx="5185800" cy="4649760"/>
           </a:xfrm>
           <a:prstGeom prst="roundRect">
             <a:avLst>
@@ -4110,14 +3674,14 @@
       </p:sp>
       <p:sp>
         <p:nvSpPr>
-          <p:cNvPr id="52" name="Овал 1"/>
+          <p:cNvPr id="51" name="Овал 1"/>
           <p:cNvSpPr/>
           <p:nvPr/>
         </p:nvSpPr>
         <p:spPr>
           <a:xfrm>
             <a:off x="4122000" y="631080"/>
-            <a:ext cx="899640" cy="899640"/>
+            <a:ext cx="899280" cy="899280"/>
           </a:xfrm>
           <a:prstGeom prst="ellipse">
             <a:avLst/>
@@ -4160,25 +3724,26 @@
                   <a:srgbClr val="ffffff"/>
                 </a:solidFill>
                 <a:latin typeface="Calibri"/>
+                <a:ea typeface="DejaVu Sans"/>
               </a:rPr>
               <a:t>01</a:t>
             </a:r>
-            <a:endParaRPr b="0" lang="ru-RU" sz="1800" spc="-1" strike="noStrike">
-              <a:latin typeface="Arial"/>
-            </a:endParaRPr>
-          </a:p>
-        </p:txBody>
-      </p:sp>
-      <p:sp>
-        <p:nvSpPr>
-          <p:cNvPr id="53" name="Овал 23"/>
+            <a:endParaRPr b="0" lang="en-US" sz="1800" spc="-1" strike="noStrike">
+              <a:latin typeface="Arial"/>
+            </a:endParaRPr>
+          </a:p>
+        </p:txBody>
+      </p:sp>
+      <p:sp>
+        <p:nvSpPr>
+          <p:cNvPr id="52" name="Овал 23"/>
           <p:cNvSpPr/>
           <p:nvPr/>
         </p:nvSpPr>
         <p:spPr>
           <a:xfrm>
             <a:off x="4122000" y="2127600"/>
-            <a:ext cx="899640" cy="887760"/>
+            <a:ext cx="899280" cy="887400"/>
           </a:xfrm>
           <a:prstGeom prst="ellipse">
             <a:avLst/>
@@ -4221,25 +3786,26 @@
                   <a:srgbClr val="ffffff"/>
                 </a:solidFill>
                 <a:latin typeface="Calibri"/>
+                <a:ea typeface="DejaVu Sans"/>
               </a:rPr>
               <a:t>02</a:t>
             </a:r>
-            <a:endParaRPr b="0" lang="ru-RU" sz="1800" spc="-1" strike="noStrike">
-              <a:latin typeface="Arial"/>
-            </a:endParaRPr>
-          </a:p>
-        </p:txBody>
-      </p:sp>
-      <p:sp>
-        <p:nvSpPr>
-          <p:cNvPr id="54" name="Овал 29"/>
+            <a:endParaRPr b="0" lang="en-US" sz="1800" spc="-1" strike="noStrike">
+              <a:latin typeface="Arial"/>
+            </a:endParaRPr>
+          </a:p>
+        </p:txBody>
+      </p:sp>
+      <p:sp>
+        <p:nvSpPr>
+          <p:cNvPr id="53" name="Овал 29"/>
           <p:cNvSpPr/>
           <p:nvPr/>
         </p:nvSpPr>
         <p:spPr>
           <a:xfrm>
             <a:off x="4122000" y="3612240"/>
-            <a:ext cx="899640" cy="899640"/>
+            <a:ext cx="899280" cy="899280"/>
           </a:xfrm>
           <a:prstGeom prst="ellipse">
             <a:avLst/>
@@ -4282,25 +3848,26 @@
                   <a:srgbClr val="ffffff"/>
                 </a:solidFill>
                 <a:latin typeface="Calibri"/>
+                <a:ea typeface="DejaVu Sans"/>
               </a:rPr>
               <a:t>03</a:t>
             </a:r>
-            <a:endParaRPr b="0" lang="ru-RU" sz="1800" spc="-1" strike="noStrike">
-              <a:latin typeface="Arial"/>
-            </a:endParaRPr>
-          </a:p>
-        </p:txBody>
-      </p:sp>
-      <p:sp>
-        <p:nvSpPr>
-          <p:cNvPr id="55" name="TextBox 10"/>
+            <a:endParaRPr b="0" lang="en-US" sz="1800" spc="-1" strike="noStrike">
+              <a:latin typeface="Arial"/>
+            </a:endParaRPr>
+          </a:p>
+        </p:txBody>
+      </p:sp>
+      <p:sp>
+        <p:nvSpPr>
+          <p:cNvPr id="54" name="TextBox 10"/>
           <p:cNvSpPr/>
           <p:nvPr/>
         </p:nvSpPr>
         <p:spPr>
           <a:xfrm>
             <a:off x="5110920" y="489600"/>
-            <a:ext cx="3579120" cy="550800"/>
+            <a:ext cx="3578760" cy="550440"/>
           </a:xfrm>
           <a:prstGeom prst="rect">
             <a:avLst/>
@@ -4347,22 +3914,22 @@
               </a:rPr>
               <a:t>1</a:t>
             </a:r>
-            <a:endParaRPr b="0" lang="ru-RU" sz="1400" spc="-1" strike="noStrike">
-              <a:latin typeface="Arial"/>
-            </a:endParaRPr>
-          </a:p>
-        </p:txBody>
-      </p:sp>
-      <p:sp>
-        <p:nvSpPr>
-          <p:cNvPr id="56" name="TextBox 10"/>
+            <a:endParaRPr b="0" lang="en-US" sz="1400" spc="-1" strike="noStrike">
+              <a:latin typeface="Arial"/>
+            </a:endParaRPr>
+          </a:p>
+        </p:txBody>
+      </p:sp>
+      <p:sp>
+        <p:nvSpPr>
+          <p:cNvPr id="55" name="TextBox 10"/>
           <p:cNvSpPr/>
           <p:nvPr/>
         </p:nvSpPr>
         <p:spPr>
           <a:xfrm>
             <a:off x="5110920" y="1025280"/>
-            <a:ext cx="3579120" cy="789840"/>
+            <a:ext cx="3578760" cy="789480"/>
           </a:xfrm>
           <a:prstGeom prst="rect">
             <a:avLst/>
@@ -4409,22 +3976,22 @@
               </a:rPr>
               <a:t>1</a:t>
             </a:r>
-            <a:endParaRPr b="0" lang="ru-RU" sz="1100" spc="-1" strike="noStrike">
-              <a:latin typeface="Arial"/>
-            </a:endParaRPr>
-          </a:p>
-        </p:txBody>
-      </p:sp>
-      <p:sp>
-        <p:nvSpPr>
-          <p:cNvPr id="57" name="TextBox 10"/>
+            <a:endParaRPr b="0" lang="en-US" sz="1100" spc="-1" strike="noStrike">
+              <a:latin typeface="Arial"/>
+            </a:endParaRPr>
+          </a:p>
+        </p:txBody>
+      </p:sp>
+      <p:sp>
+        <p:nvSpPr>
+          <p:cNvPr id="56" name="TextBox 10"/>
           <p:cNvSpPr/>
           <p:nvPr/>
         </p:nvSpPr>
         <p:spPr>
           <a:xfrm>
             <a:off x="5107320" y="1985400"/>
-            <a:ext cx="3579120" cy="550800"/>
+            <a:ext cx="3578760" cy="550440"/>
           </a:xfrm>
           <a:prstGeom prst="rect">
             <a:avLst/>
@@ -4461,22 +4028,22 @@
               </a:rPr>
               <a:t>SUBTITLE2</a:t>
             </a:r>
-            <a:endParaRPr b="0" lang="ru-RU" sz="1400" spc="-1" strike="noStrike">
-              <a:latin typeface="Arial"/>
-            </a:endParaRPr>
-          </a:p>
-        </p:txBody>
-      </p:sp>
-      <p:sp>
-        <p:nvSpPr>
-          <p:cNvPr id="58" name="TextBox 10"/>
+            <a:endParaRPr b="0" lang="en-US" sz="1400" spc="-1" strike="noStrike">
+              <a:latin typeface="Arial"/>
+            </a:endParaRPr>
+          </a:p>
+        </p:txBody>
+      </p:sp>
+      <p:sp>
+        <p:nvSpPr>
+          <p:cNvPr id="57" name="TextBox 10"/>
           <p:cNvSpPr/>
           <p:nvPr/>
         </p:nvSpPr>
         <p:spPr>
           <a:xfrm>
             <a:off x="5107320" y="2517840"/>
-            <a:ext cx="3579120" cy="843480"/>
+            <a:ext cx="3578760" cy="843120"/>
           </a:xfrm>
           <a:prstGeom prst="rect">
             <a:avLst/>
@@ -4523,22 +4090,22 @@
               </a:rPr>
               <a:t>2</a:t>
             </a:r>
-            <a:endParaRPr b="0" lang="ru-RU" sz="1100" spc="-1" strike="noStrike">
-              <a:latin typeface="Arial"/>
-            </a:endParaRPr>
-          </a:p>
-        </p:txBody>
-      </p:sp>
-      <p:sp>
-        <p:nvSpPr>
-          <p:cNvPr id="59" name="TextBox 10"/>
+            <a:endParaRPr b="0" lang="en-US" sz="1100" spc="-1" strike="noStrike">
+              <a:latin typeface="Arial"/>
+            </a:endParaRPr>
+          </a:p>
+        </p:txBody>
+      </p:sp>
+      <p:sp>
+        <p:nvSpPr>
+          <p:cNvPr id="58" name="TextBox 10"/>
           <p:cNvSpPr/>
           <p:nvPr/>
         </p:nvSpPr>
         <p:spPr>
           <a:xfrm>
             <a:off x="5107320" y="3470760"/>
-            <a:ext cx="3579120" cy="550800"/>
+            <a:ext cx="3578760" cy="550440"/>
           </a:xfrm>
           <a:prstGeom prst="rect">
             <a:avLst/>
@@ -4575,22 +4142,22 @@
               </a:rPr>
               <a:t>SUBTITLE3</a:t>
             </a:r>
-            <a:endParaRPr b="0" lang="ru-RU" sz="1400" spc="-1" strike="noStrike">
-              <a:latin typeface="Arial"/>
-            </a:endParaRPr>
-          </a:p>
-        </p:txBody>
-      </p:sp>
-      <p:sp>
-        <p:nvSpPr>
-          <p:cNvPr id="60" name="TextBox 10"/>
+            <a:endParaRPr b="0" lang="en-US" sz="1400" spc="-1" strike="noStrike">
+              <a:latin typeface="Arial"/>
+            </a:endParaRPr>
+          </a:p>
+        </p:txBody>
+      </p:sp>
+      <p:sp>
+        <p:nvSpPr>
+          <p:cNvPr id="59" name="TextBox 10"/>
           <p:cNvSpPr/>
           <p:nvPr/>
         </p:nvSpPr>
         <p:spPr>
           <a:xfrm>
             <a:off x="5107320" y="4003560"/>
-            <a:ext cx="3579120" cy="794880"/>
+            <a:ext cx="3578760" cy="794520"/>
           </a:xfrm>
           <a:prstGeom prst="rect">
             <a:avLst/>
@@ -4637,22 +4204,22 @@
               </a:rPr>
               <a:t>3</a:t>
             </a:r>
-            <a:endParaRPr b="0" lang="ru-RU" sz="1100" spc="-1" strike="noStrike">
-              <a:latin typeface="Arial"/>
-            </a:endParaRPr>
-          </a:p>
-        </p:txBody>
-      </p:sp>
-      <p:sp>
-        <p:nvSpPr>
-          <p:cNvPr id="61" name="TextBox 13"/>
+            <a:endParaRPr b="0" lang="en-US" sz="1100" spc="-1" strike="noStrike">
+              <a:latin typeface="Arial"/>
+            </a:endParaRPr>
+          </a:p>
+        </p:txBody>
+      </p:sp>
+      <p:sp>
+        <p:nvSpPr>
+          <p:cNvPr id="60" name="TextBox 13"/>
           <p:cNvSpPr/>
           <p:nvPr/>
         </p:nvSpPr>
         <p:spPr>
           <a:xfrm>
             <a:off x="165960" y="200880"/>
-            <a:ext cx="3148200" cy="1842120"/>
+            <a:ext cx="3147840" cy="1841760"/>
           </a:xfrm>
           <a:prstGeom prst="rect">
             <a:avLst/>
@@ -4685,10 +4252,11 @@
                   <a:srgbClr val="ffffff"/>
                 </a:solidFill>
                 <a:latin typeface="Arial"/>
+                <a:ea typeface="DejaVu Sans"/>
               </a:rPr>
               <a:t>TITLE</a:t>
             </a:r>
-            <a:endParaRPr b="0" lang="ru-RU" sz="2200" spc="-1" strike="noStrike">
+            <a:endParaRPr b="0" lang="en-US" sz="2200" spc="-1" strike="noStrike">
               <a:latin typeface="Arial"/>
             </a:endParaRPr>
           </a:p>
@@ -4733,14 +4301,14 @@
       </p:grpSpPr>
       <p:sp>
         <p:nvSpPr>
-          <p:cNvPr id="62" name="Прямоугольник со скругленными углами 3"/>
+          <p:cNvPr id="61" name="Прямоугольник со скругленными углами 3"/>
           <p:cNvSpPr/>
           <p:nvPr/>
         </p:nvSpPr>
         <p:spPr>
           <a:xfrm>
             <a:off x="0" y="0"/>
-            <a:ext cx="9143640" cy="1961640"/>
+            <a:ext cx="9143280" cy="1961280"/>
           </a:xfrm>
           <a:prstGeom prst="roundRect">
             <a:avLst>
@@ -4791,22 +4359,22 @@
               </a:rPr>
               <a:t>PIC</a:t>
             </a:r>
-            <a:endParaRPr b="0" lang="ru-RU" sz="1800" spc="-1" strike="noStrike">
-              <a:latin typeface="Arial"/>
-            </a:endParaRPr>
-          </a:p>
-        </p:txBody>
-      </p:sp>
-      <p:sp>
-        <p:nvSpPr>
-          <p:cNvPr id="63" name="TextBox 10"/>
+            <a:endParaRPr b="0" lang="en-US" sz="1800" spc="-1" strike="noStrike">
+              <a:latin typeface="Arial"/>
+            </a:endParaRPr>
+          </a:p>
+        </p:txBody>
+      </p:sp>
+      <p:sp>
+        <p:nvSpPr>
+          <p:cNvPr id="62" name="TextBox 10"/>
           <p:cNvSpPr/>
           <p:nvPr/>
         </p:nvSpPr>
         <p:spPr>
           <a:xfrm>
             <a:off x="384840" y="2571840"/>
-            <a:ext cx="2665080" cy="713880"/>
+            <a:ext cx="2664720" cy="713520"/>
           </a:xfrm>
           <a:prstGeom prst="rect">
             <a:avLst/>
@@ -4843,22 +4411,22 @@
               </a:rPr>
               <a:t>SUBTITLE1</a:t>
             </a:r>
-            <a:endParaRPr b="0" lang="ru-RU" sz="1400" spc="-1" strike="noStrike">
-              <a:latin typeface="Arial"/>
-            </a:endParaRPr>
-          </a:p>
-        </p:txBody>
-      </p:sp>
-      <p:sp>
-        <p:nvSpPr>
-          <p:cNvPr id="64" name="TextBox 10"/>
+            <a:endParaRPr b="0" lang="en-US" sz="1400" spc="-1" strike="noStrike">
+              <a:latin typeface="Arial"/>
+            </a:endParaRPr>
+          </a:p>
+        </p:txBody>
+      </p:sp>
+      <p:sp>
+        <p:nvSpPr>
+          <p:cNvPr id="63" name="TextBox 10"/>
           <p:cNvSpPr/>
           <p:nvPr/>
         </p:nvSpPr>
         <p:spPr>
           <a:xfrm>
             <a:off x="384840" y="3356280"/>
-            <a:ext cx="2665080" cy="1565280"/>
+            <a:ext cx="2664720" cy="1564920"/>
           </a:xfrm>
           <a:prstGeom prst="rect">
             <a:avLst/>
@@ -4905,22 +4473,22 @@
               </a:rPr>
               <a:t>1</a:t>
             </a:r>
-            <a:endParaRPr b="0" lang="ru-RU" sz="1100" spc="-1" strike="noStrike">
-              <a:latin typeface="Arial"/>
-            </a:endParaRPr>
-          </a:p>
-        </p:txBody>
-      </p:sp>
-      <p:sp>
-        <p:nvSpPr>
-          <p:cNvPr id="65" name="TextBox 10"/>
+            <a:endParaRPr b="0" lang="en-US" sz="1100" spc="-1" strike="noStrike">
+              <a:latin typeface="Arial"/>
+            </a:endParaRPr>
+          </a:p>
+        </p:txBody>
+      </p:sp>
+      <p:sp>
+        <p:nvSpPr>
+          <p:cNvPr id="64" name="TextBox 10"/>
           <p:cNvSpPr/>
           <p:nvPr/>
         </p:nvSpPr>
         <p:spPr>
           <a:xfrm>
             <a:off x="3239280" y="2571840"/>
-            <a:ext cx="2665080" cy="713880"/>
+            <a:ext cx="2664720" cy="713520"/>
           </a:xfrm>
           <a:prstGeom prst="rect">
             <a:avLst/>
@@ -4957,22 +4525,22 @@
               </a:rPr>
               <a:t>SUBTITLE2</a:t>
             </a:r>
-            <a:endParaRPr b="0" lang="ru-RU" sz="1400" spc="-1" strike="noStrike">
-              <a:latin typeface="Arial"/>
-            </a:endParaRPr>
-          </a:p>
-        </p:txBody>
-      </p:sp>
-      <p:sp>
-        <p:nvSpPr>
-          <p:cNvPr id="66" name="TextBox 10"/>
+            <a:endParaRPr b="0" lang="en-US" sz="1400" spc="-1" strike="noStrike">
+              <a:latin typeface="Arial"/>
+            </a:endParaRPr>
+          </a:p>
+        </p:txBody>
+      </p:sp>
+      <p:sp>
+        <p:nvSpPr>
+          <p:cNvPr id="65" name="TextBox 10"/>
           <p:cNvSpPr/>
           <p:nvPr/>
         </p:nvSpPr>
         <p:spPr>
           <a:xfrm>
             <a:off x="3239280" y="3356280"/>
-            <a:ext cx="2665080" cy="1565280"/>
+            <a:ext cx="2664720" cy="1564920"/>
           </a:xfrm>
           <a:prstGeom prst="rect">
             <a:avLst/>
@@ -5019,22 +4587,22 @@
               </a:rPr>
               <a:t>2</a:t>
             </a:r>
-            <a:endParaRPr b="0" lang="ru-RU" sz="1100" spc="-1" strike="noStrike">
-              <a:latin typeface="Arial"/>
-            </a:endParaRPr>
-          </a:p>
-        </p:txBody>
-      </p:sp>
-      <p:sp>
-        <p:nvSpPr>
-          <p:cNvPr id="67" name="TextBox 10"/>
+            <a:endParaRPr b="0" lang="en-US" sz="1100" spc="-1" strike="noStrike">
+              <a:latin typeface="Arial"/>
+            </a:endParaRPr>
+          </a:p>
+        </p:txBody>
+      </p:sp>
+      <p:sp>
+        <p:nvSpPr>
+          <p:cNvPr id="66" name="TextBox 10"/>
           <p:cNvSpPr/>
           <p:nvPr/>
         </p:nvSpPr>
         <p:spPr>
           <a:xfrm>
             <a:off x="6093720" y="2571840"/>
-            <a:ext cx="2665080" cy="713880"/>
+            <a:ext cx="2664720" cy="713520"/>
           </a:xfrm>
           <a:prstGeom prst="rect">
             <a:avLst/>
@@ -5071,22 +4639,22 @@
               </a:rPr>
               <a:t>SUBTITLE3</a:t>
             </a:r>
-            <a:endParaRPr b="0" lang="ru-RU" sz="1400" spc="-1" strike="noStrike">
-              <a:latin typeface="Arial"/>
-            </a:endParaRPr>
-          </a:p>
-        </p:txBody>
-      </p:sp>
-      <p:sp>
-        <p:nvSpPr>
-          <p:cNvPr id="68" name="TextBox 10"/>
+            <a:endParaRPr b="0" lang="en-US" sz="1400" spc="-1" strike="noStrike">
+              <a:latin typeface="Arial"/>
+            </a:endParaRPr>
+          </a:p>
+        </p:txBody>
+      </p:sp>
+      <p:sp>
+        <p:nvSpPr>
+          <p:cNvPr id="67" name="TextBox 10"/>
           <p:cNvSpPr/>
           <p:nvPr/>
         </p:nvSpPr>
         <p:spPr>
           <a:xfrm>
             <a:off x="6093720" y="3356280"/>
-            <a:ext cx="2665080" cy="1565280"/>
+            <a:ext cx="2664720" cy="1564920"/>
           </a:xfrm>
           <a:prstGeom prst="rect">
             <a:avLst/>
@@ -5133,22 +4701,22 @@
               </a:rPr>
               <a:t>3</a:t>
             </a:r>
-            <a:endParaRPr b="0" lang="ru-RU" sz="1100" spc="-1" strike="noStrike">
-              <a:latin typeface="Arial"/>
-            </a:endParaRPr>
-          </a:p>
-        </p:txBody>
-      </p:sp>
-      <p:sp>
-        <p:nvSpPr>
-          <p:cNvPr id="69" name="TextBox 9"/>
+            <a:endParaRPr b="0" lang="en-US" sz="1100" spc="-1" strike="noStrike">
+              <a:latin typeface="Arial"/>
+            </a:endParaRPr>
+          </a:p>
+        </p:txBody>
+      </p:sp>
+      <p:sp>
+        <p:nvSpPr>
+          <p:cNvPr id="68" name="TextBox 9"/>
           <p:cNvSpPr/>
           <p:nvPr/>
         </p:nvSpPr>
         <p:spPr>
           <a:xfrm>
             <a:off x="384840" y="2178000"/>
-            <a:ext cx="8465760" cy="480960"/>
+            <a:ext cx="8465400" cy="480600"/>
           </a:xfrm>
           <a:prstGeom prst="rect">
             <a:avLst/>
@@ -5181,10 +4749,11 @@
                   <a:srgbClr val="ffffff"/>
                 </a:solidFill>
                 <a:latin typeface="Arial"/>
+                <a:ea typeface="DejaVu Sans"/>
               </a:rPr>
               <a:t>TITLE</a:t>
             </a:r>
-            <a:endParaRPr b="0" lang="ru-RU" sz="2200" spc="-1" strike="noStrike">
+            <a:endParaRPr b="0" lang="en-US" sz="2200" spc="-1" strike="noStrike">
               <a:latin typeface="Arial"/>
             </a:endParaRPr>
           </a:p>
@@ -5229,14 +4798,14 @@
       </p:grpSpPr>
       <p:sp>
         <p:nvSpPr>
-          <p:cNvPr id="70" name="Прямоугольник: скругленные углы 15"/>
+          <p:cNvPr id="69" name="Прямоугольник: скругленные углы 15"/>
           <p:cNvSpPr/>
           <p:nvPr/>
         </p:nvSpPr>
         <p:spPr>
           <a:xfrm>
             <a:off x="4636440" y="250200"/>
-            <a:ext cx="4198320" cy="4625280"/>
+            <a:ext cx="4197960" cy="4624920"/>
           </a:xfrm>
           <a:prstGeom prst="roundRect">
             <a:avLst>
@@ -5283,25 +4852,26 @@
                   <a:srgbClr val="ffffff"/>
                 </a:solidFill>
                 <a:latin typeface="Calibri"/>
+                <a:ea typeface="DejaVu Sans"/>
               </a:rPr>
               <a:t>PIC</a:t>
             </a:r>
-            <a:endParaRPr b="0" lang="ru-RU" sz="1800" spc="-1" strike="noStrike">
-              <a:latin typeface="Arial"/>
-            </a:endParaRPr>
-          </a:p>
-        </p:txBody>
-      </p:sp>
-      <p:sp>
-        <p:nvSpPr>
-          <p:cNvPr id="71" name="Прямоугольник: скругленные углы 16"/>
+            <a:endParaRPr b="0" lang="en-US" sz="1800" spc="-1" strike="noStrike">
+              <a:latin typeface="Arial"/>
+            </a:endParaRPr>
+          </a:p>
+        </p:txBody>
+      </p:sp>
+      <p:sp>
+        <p:nvSpPr>
+          <p:cNvPr id="70" name="Прямоугольник: скругленные углы 16"/>
           <p:cNvSpPr/>
           <p:nvPr/>
         </p:nvSpPr>
         <p:spPr>
           <a:xfrm>
             <a:off x="329400" y="257040"/>
-            <a:ext cx="4198320" cy="4625280"/>
+            <a:ext cx="4197960" cy="4624920"/>
           </a:xfrm>
           <a:prstGeom prst="roundRect">
             <a:avLst>
@@ -5335,14 +4905,14 @@
       </p:sp>
       <p:sp>
         <p:nvSpPr>
-          <p:cNvPr id="72" name="Овал 9"/>
+          <p:cNvPr id="71" name="Овал 9"/>
           <p:cNvSpPr/>
           <p:nvPr/>
         </p:nvSpPr>
         <p:spPr>
           <a:xfrm>
             <a:off x="4272120" y="1193040"/>
-            <a:ext cx="635400" cy="635400"/>
+            <a:ext cx="635040" cy="635040"/>
           </a:xfrm>
           <a:prstGeom prst="ellipse">
             <a:avLst/>
@@ -5371,14 +4941,14 @@
       </p:sp>
       <p:sp>
         <p:nvSpPr>
-          <p:cNvPr id="73" name="TextBox 10"/>
+          <p:cNvPr id="72" name="TextBox 10"/>
           <p:cNvSpPr/>
           <p:nvPr/>
         </p:nvSpPr>
         <p:spPr>
           <a:xfrm>
             <a:off x="581760" y="828720"/>
-            <a:ext cx="3693600" cy="550800"/>
+            <a:ext cx="3693240" cy="550440"/>
           </a:xfrm>
           <a:prstGeom prst="rect">
             <a:avLst/>
@@ -5425,22 +4995,22 @@
               </a:rPr>
               <a:t>1</a:t>
             </a:r>
-            <a:endParaRPr b="0" lang="ru-RU" sz="1400" spc="-1" strike="noStrike">
-              <a:latin typeface="Arial"/>
-            </a:endParaRPr>
-          </a:p>
-        </p:txBody>
-      </p:sp>
-      <p:sp>
-        <p:nvSpPr>
-          <p:cNvPr id="74" name="TextBox 10"/>
+            <a:endParaRPr b="0" lang="en-US" sz="1400" spc="-1" strike="noStrike">
+              <a:latin typeface="Arial"/>
+            </a:endParaRPr>
+          </a:p>
+        </p:txBody>
+      </p:sp>
+      <p:sp>
+        <p:nvSpPr>
+          <p:cNvPr id="73" name="TextBox 10"/>
           <p:cNvSpPr/>
           <p:nvPr/>
         </p:nvSpPr>
         <p:spPr>
           <a:xfrm>
             <a:off x="581760" y="1364400"/>
-            <a:ext cx="3693600" cy="789840"/>
+            <a:ext cx="3693240" cy="789480"/>
           </a:xfrm>
           <a:prstGeom prst="rect">
             <a:avLst/>
@@ -5487,22 +5057,22 @@
               </a:rPr>
               <a:t>1</a:t>
             </a:r>
-            <a:endParaRPr b="0" lang="ru-RU" sz="1100" spc="-1" strike="noStrike">
-              <a:latin typeface="Arial"/>
-            </a:endParaRPr>
-          </a:p>
-        </p:txBody>
-      </p:sp>
-      <p:sp>
-        <p:nvSpPr>
-          <p:cNvPr id="75" name="TextBox 10"/>
+            <a:endParaRPr b="0" lang="en-US" sz="1100" spc="-1" strike="noStrike">
+              <a:latin typeface="Arial"/>
+            </a:endParaRPr>
+          </a:p>
+        </p:txBody>
+      </p:sp>
+      <p:sp>
+        <p:nvSpPr>
+          <p:cNvPr id="74" name="TextBox 10"/>
           <p:cNvSpPr/>
           <p:nvPr/>
         </p:nvSpPr>
         <p:spPr>
           <a:xfrm>
             <a:off x="578160" y="2154600"/>
-            <a:ext cx="3693600" cy="550800"/>
+            <a:ext cx="3693240" cy="550440"/>
           </a:xfrm>
           <a:prstGeom prst="rect">
             <a:avLst/>
@@ -5539,22 +5109,22 @@
               </a:rPr>
               <a:t>SUBTITLE2</a:t>
             </a:r>
-            <a:endParaRPr b="0" lang="ru-RU" sz="1400" spc="-1" strike="noStrike">
-              <a:latin typeface="Arial"/>
-            </a:endParaRPr>
-          </a:p>
-        </p:txBody>
-      </p:sp>
-      <p:sp>
-        <p:nvSpPr>
-          <p:cNvPr id="76" name="TextBox 10"/>
+            <a:endParaRPr b="0" lang="en-US" sz="1400" spc="-1" strike="noStrike">
+              <a:latin typeface="Arial"/>
+            </a:endParaRPr>
+          </a:p>
+        </p:txBody>
+      </p:sp>
+      <p:sp>
+        <p:nvSpPr>
+          <p:cNvPr id="75" name="TextBox 10"/>
           <p:cNvSpPr/>
           <p:nvPr/>
         </p:nvSpPr>
         <p:spPr>
           <a:xfrm>
             <a:off x="578160" y="2687040"/>
-            <a:ext cx="3693600" cy="843480"/>
+            <a:ext cx="3693240" cy="843120"/>
           </a:xfrm>
           <a:prstGeom prst="rect">
             <a:avLst/>
@@ -5601,22 +5171,22 @@
               </a:rPr>
               <a:t>2</a:t>
             </a:r>
-            <a:endParaRPr b="0" lang="ru-RU" sz="1100" spc="-1" strike="noStrike">
-              <a:latin typeface="Arial"/>
-            </a:endParaRPr>
-          </a:p>
-        </p:txBody>
-      </p:sp>
-      <p:sp>
-        <p:nvSpPr>
-          <p:cNvPr id="77" name="TextBox 10"/>
+            <a:endParaRPr b="0" lang="en-US" sz="1100" spc="-1" strike="noStrike">
+              <a:latin typeface="Arial"/>
+            </a:endParaRPr>
+          </a:p>
+        </p:txBody>
+      </p:sp>
+      <p:sp>
+        <p:nvSpPr>
+          <p:cNvPr id="76" name="TextBox 10"/>
           <p:cNvSpPr/>
           <p:nvPr/>
         </p:nvSpPr>
         <p:spPr>
           <a:xfrm>
             <a:off x="578160" y="3482280"/>
-            <a:ext cx="3693600" cy="550800"/>
+            <a:ext cx="3693240" cy="550440"/>
           </a:xfrm>
           <a:prstGeom prst="rect">
             <a:avLst/>
@@ -5653,22 +5223,22 @@
               </a:rPr>
               <a:t>SUBTITLE3</a:t>
             </a:r>
-            <a:endParaRPr b="0" lang="ru-RU" sz="1400" spc="-1" strike="noStrike">
-              <a:latin typeface="Arial"/>
-            </a:endParaRPr>
-          </a:p>
-        </p:txBody>
-      </p:sp>
-      <p:sp>
-        <p:nvSpPr>
-          <p:cNvPr id="78" name="TextBox 10"/>
+            <a:endParaRPr b="0" lang="en-US" sz="1400" spc="-1" strike="noStrike">
+              <a:latin typeface="Arial"/>
+            </a:endParaRPr>
+          </a:p>
+        </p:txBody>
+      </p:sp>
+      <p:sp>
+        <p:nvSpPr>
+          <p:cNvPr id="77" name="TextBox 10"/>
           <p:cNvSpPr/>
           <p:nvPr/>
         </p:nvSpPr>
         <p:spPr>
           <a:xfrm>
             <a:off x="578160" y="4015080"/>
-            <a:ext cx="3693600" cy="794880"/>
+            <a:ext cx="3693240" cy="794520"/>
           </a:xfrm>
           <a:prstGeom prst="rect">
             <a:avLst/>
@@ -5715,22 +5285,22 @@
               </a:rPr>
               <a:t>3</a:t>
             </a:r>
-            <a:endParaRPr b="0" lang="ru-RU" sz="1100" spc="-1" strike="noStrike">
-              <a:latin typeface="Arial"/>
-            </a:endParaRPr>
-          </a:p>
-        </p:txBody>
-      </p:sp>
-      <p:sp>
-        <p:nvSpPr>
-          <p:cNvPr id="79" name="TextBox 30"/>
+            <a:endParaRPr b="0" lang="en-US" sz="1100" spc="-1" strike="noStrike">
+              <a:latin typeface="Arial"/>
+            </a:endParaRPr>
+          </a:p>
+        </p:txBody>
+      </p:sp>
+      <p:sp>
+        <p:nvSpPr>
+          <p:cNvPr id="78" name="TextBox 30"/>
           <p:cNvSpPr/>
           <p:nvPr/>
         </p:nvSpPr>
         <p:spPr>
           <a:xfrm>
             <a:off x="553680" y="352440"/>
-            <a:ext cx="3803760" cy="789840"/>
+            <a:ext cx="3803400" cy="789480"/>
           </a:xfrm>
           <a:prstGeom prst="rect">
             <a:avLst/>
@@ -5763,10 +5333,11 @@
                   <a:srgbClr val="ffffff"/>
                 </a:solidFill>
                 <a:latin typeface="Arial"/>
+                <a:ea typeface="DejaVu Sans"/>
               </a:rPr>
               <a:t>TITLE</a:t>
             </a:r>
-            <a:endParaRPr b="0" lang="ru-RU" sz="2200" spc="-1" strike="noStrike">
+            <a:endParaRPr b="0" lang="en-US" sz="2200" spc="-1" strike="noStrike">
               <a:latin typeface="Arial"/>
             </a:endParaRPr>
           </a:p>
@@ -5811,14 +5382,14 @@
       </p:grpSpPr>
       <p:sp>
         <p:nvSpPr>
-          <p:cNvPr id="80" name="TextBox 20"/>
+          <p:cNvPr id="79" name="TextBox 20"/>
           <p:cNvSpPr/>
           <p:nvPr/>
         </p:nvSpPr>
         <p:spPr>
           <a:xfrm>
             <a:off x="516960" y="411840"/>
-            <a:ext cx="8465760" cy="480960"/>
+            <a:ext cx="8465400" cy="480600"/>
           </a:xfrm>
           <a:prstGeom prst="rect">
             <a:avLst/>
@@ -5851,25 +5422,26 @@
                   <a:srgbClr val="ffffff"/>
                 </a:solidFill>
                 <a:latin typeface="Arial"/>
+                <a:ea typeface="DejaVu Sans"/>
               </a:rPr>
               <a:t>TITLE</a:t>
             </a:r>
-            <a:endParaRPr b="0" lang="ru-RU" sz="2200" spc="-1" strike="noStrike">
-              <a:latin typeface="Arial"/>
-            </a:endParaRPr>
-          </a:p>
-        </p:txBody>
-      </p:sp>
-      <p:sp>
-        <p:nvSpPr>
-          <p:cNvPr id="81" name="Прямоугольник со скругленными углами 3"/>
+            <a:endParaRPr b="0" lang="en-US" sz="2200" spc="-1" strike="noStrike">
+              <a:latin typeface="Arial"/>
+            </a:endParaRPr>
+          </a:p>
+        </p:txBody>
+      </p:sp>
+      <p:sp>
+        <p:nvSpPr>
+          <p:cNvPr id="80" name="Прямоугольник со скругленными углами 3"/>
           <p:cNvSpPr/>
           <p:nvPr/>
         </p:nvSpPr>
         <p:spPr>
           <a:xfrm>
             <a:off x="456480" y="1406160"/>
-            <a:ext cx="2300760" cy="1440000"/>
+            <a:ext cx="2300400" cy="1439640"/>
           </a:xfrm>
           <a:prstGeom prst="roundRect">
             <a:avLst>
@@ -5920,22 +5492,22 @@
               </a:rPr>
               <a:t>PIC</a:t>
             </a:r>
-            <a:endParaRPr b="0" lang="ru-RU" sz="1800" spc="-1" strike="noStrike">
-              <a:latin typeface="Arial"/>
-            </a:endParaRPr>
-          </a:p>
-        </p:txBody>
-      </p:sp>
-      <p:sp>
-        <p:nvSpPr>
-          <p:cNvPr id="82" name="TextBox 10"/>
+            <a:endParaRPr b="0" lang="en-US" sz="1800" spc="-1" strike="noStrike">
+              <a:latin typeface="Arial"/>
+            </a:endParaRPr>
+          </a:p>
+        </p:txBody>
+      </p:sp>
+      <p:sp>
+        <p:nvSpPr>
+          <p:cNvPr id="81" name="TextBox 10"/>
           <p:cNvSpPr/>
           <p:nvPr/>
         </p:nvSpPr>
         <p:spPr>
           <a:xfrm>
             <a:off x="384840" y="3013560"/>
-            <a:ext cx="2429280" cy="713880"/>
+            <a:ext cx="2428920" cy="713520"/>
           </a:xfrm>
           <a:prstGeom prst="rect">
             <a:avLst/>
@@ -5972,22 +5544,22 @@
               </a:rPr>
               <a:t>SUBTITLE1</a:t>
             </a:r>
-            <a:endParaRPr b="0" lang="ru-RU" sz="1400" spc="-1" strike="noStrike">
-              <a:latin typeface="Arial"/>
-            </a:endParaRPr>
-          </a:p>
-        </p:txBody>
-      </p:sp>
-      <p:sp>
-        <p:nvSpPr>
-          <p:cNvPr id="83" name="TextBox 10"/>
+            <a:endParaRPr b="0" lang="en-US" sz="1400" spc="-1" strike="noStrike">
+              <a:latin typeface="Arial"/>
+            </a:endParaRPr>
+          </a:p>
+        </p:txBody>
+      </p:sp>
+      <p:sp>
+        <p:nvSpPr>
+          <p:cNvPr id="82" name="TextBox 10"/>
           <p:cNvSpPr/>
           <p:nvPr/>
         </p:nvSpPr>
         <p:spPr>
           <a:xfrm>
             <a:off x="384840" y="3798000"/>
-            <a:ext cx="2429280" cy="1037880"/>
+            <a:ext cx="2428920" cy="1037520"/>
           </a:xfrm>
           <a:prstGeom prst="rect">
             <a:avLst/>
@@ -6034,22 +5606,22 @@
               </a:rPr>
               <a:t>1</a:t>
             </a:r>
-            <a:endParaRPr b="0" lang="ru-RU" sz="1100" spc="-1" strike="noStrike">
-              <a:latin typeface="Arial"/>
-            </a:endParaRPr>
-          </a:p>
-        </p:txBody>
-      </p:sp>
-      <p:sp>
-        <p:nvSpPr>
-          <p:cNvPr id="84" name="Прямоугольник: скругленные углы 1"/>
+            <a:endParaRPr b="0" lang="en-US" sz="1100" spc="-1" strike="noStrike">
+              <a:latin typeface="Arial"/>
+            </a:endParaRPr>
+          </a:p>
+        </p:txBody>
+      </p:sp>
+      <p:sp>
+        <p:nvSpPr>
+          <p:cNvPr id="83" name="Прямоугольник: скругленные углы 1"/>
           <p:cNvSpPr/>
           <p:nvPr/>
         </p:nvSpPr>
         <p:spPr>
           <a:xfrm>
             <a:off x="328680" y="228600"/>
-            <a:ext cx="8501400" cy="813960"/>
+            <a:ext cx="8501040" cy="813600"/>
           </a:xfrm>
           <a:prstGeom prst="roundRect">
             <a:avLst>
@@ -6080,14 +5652,14 @@
       </p:sp>
       <p:sp>
         <p:nvSpPr>
-          <p:cNvPr id="85" name="Прямоугольник: скругленные углы 10"/>
+          <p:cNvPr id="84" name="Прямоугольник: скругленные углы 10"/>
           <p:cNvSpPr/>
           <p:nvPr/>
         </p:nvSpPr>
         <p:spPr>
           <a:xfrm>
             <a:off x="328680" y="1279080"/>
-            <a:ext cx="2557080" cy="3642840"/>
+            <a:ext cx="2556720" cy="3642480"/>
           </a:xfrm>
           <a:prstGeom prst="roundRect">
             <a:avLst>
@@ -6118,14 +5690,14 @@
       </p:sp>
       <p:sp>
         <p:nvSpPr>
-          <p:cNvPr id="86" name="Прямоугольник со скругленными углами 3"/>
+          <p:cNvPr id="85" name="Прямоугольник со скругленными углами 3"/>
           <p:cNvSpPr/>
           <p:nvPr/>
         </p:nvSpPr>
         <p:spPr>
           <a:xfrm>
             <a:off x="3421080" y="1398960"/>
-            <a:ext cx="2300760" cy="1440000"/>
+            <a:ext cx="2300400" cy="1439640"/>
           </a:xfrm>
           <a:prstGeom prst="roundRect">
             <a:avLst>
@@ -6176,22 +5748,22 @@
               </a:rPr>
               <a:t>PIC</a:t>
             </a:r>
-            <a:endParaRPr b="0" lang="ru-RU" sz="1800" spc="-1" strike="noStrike">
-              <a:latin typeface="Arial"/>
-            </a:endParaRPr>
-          </a:p>
-        </p:txBody>
-      </p:sp>
-      <p:sp>
-        <p:nvSpPr>
-          <p:cNvPr id="87" name="TextBox 10"/>
+            <a:endParaRPr b="0" lang="en-US" sz="1800" spc="-1" strike="noStrike">
+              <a:latin typeface="Arial"/>
+            </a:endParaRPr>
+          </a:p>
+        </p:txBody>
+      </p:sp>
+      <p:sp>
+        <p:nvSpPr>
+          <p:cNvPr id="86" name="TextBox 10"/>
           <p:cNvSpPr/>
           <p:nvPr/>
         </p:nvSpPr>
         <p:spPr>
           <a:xfrm>
             <a:off x="3349440" y="3013560"/>
-            <a:ext cx="2429280" cy="713880"/>
+            <a:ext cx="2428920" cy="713520"/>
           </a:xfrm>
           <a:prstGeom prst="rect">
             <a:avLst/>
@@ -6238,22 +5810,22 @@
               </a:rPr>
               <a:t>2</a:t>
             </a:r>
-            <a:endParaRPr b="0" lang="ru-RU" sz="1400" spc="-1" strike="noStrike">
-              <a:latin typeface="Arial"/>
-            </a:endParaRPr>
-          </a:p>
-        </p:txBody>
-      </p:sp>
-      <p:sp>
-        <p:nvSpPr>
-          <p:cNvPr id="88" name="TextBox 10"/>
+            <a:endParaRPr b="0" lang="en-US" sz="1400" spc="-1" strike="noStrike">
+              <a:latin typeface="Arial"/>
+            </a:endParaRPr>
+          </a:p>
+        </p:txBody>
+      </p:sp>
+      <p:sp>
+        <p:nvSpPr>
+          <p:cNvPr id="87" name="TextBox 10"/>
           <p:cNvSpPr/>
           <p:nvPr/>
         </p:nvSpPr>
         <p:spPr>
           <a:xfrm>
             <a:off x="3349440" y="3798000"/>
-            <a:ext cx="2429280" cy="1037880"/>
+            <a:ext cx="2428920" cy="1037520"/>
           </a:xfrm>
           <a:prstGeom prst="rect">
             <a:avLst/>
@@ -6300,22 +5872,22 @@
               </a:rPr>
               <a:t>2</a:t>
             </a:r>
-            <a:endParaRPr b="0" lang="ru-RU" sz="1100" spc="-1" strike="noStrike">
-              <a:latin typeface="Arial"/>
-            </a:endParaRPr>
-          </a:p>
-        </p:txBody>
-      </p:sp>
-      <p:sp>
-        <p:nvSpPr>
-          <p:cNvPr id="89" name="Прямоугольник: скругленные углы 14"/>
+            <a:endParaRPr b="0" lang="en-US" sz="1100" spc="-1" strike="noStrike">
+              <a:latin typeface="Arial"/>
+            </a:endParaRPr>
+          </a:p>
+        </p:txBody>
+      </p:sp>
+      <p:sp>
+        <p:nvSpPr>
+          <p:cNvPr id="88" name="Прямоугольник: скругленные углы 14"/>
           <p:cNvSpPr/>
           <p:nvPr/>
         </p:nvSpPr>
         <p:spPr>
           <a:xfrm>
             <a:off x="3293280" y="1271880"/>
-            <a:ext cx="2557080" cy="3642840"/>
+            <a:ext cx="2556720" cy="3642480"/>
           </a:xfrm>
           <a:prstGeom prst="roundRect">
             <a:avLst>
@@ -6346,14 +5918,14 @@
       </p:sp>
       <p:sp>
         <p:nvSpPr>
-          <p:cNvPr id="90" name="Прямоугольник со скругленными углами 3"/>
+          <p:cNvPr id="89" name="Прямоугольник со скругленными углами 3"/>
           <p:cNvSpPr/>
           <p:nvPr/>
         </p:nvSpPr>
         <p:spPr>
           <a:xfrm>
             <a:off x="6400800" y="1379520"/>
-            <a:ext cx="2300760" cy="1440000"/>
+            <a:ext cx="2300400" cy="1439640"/>
           </a:xfrm>
           <a:prstGeom prst="roundRect">
             <a:avLst>
@@ -6404,22 +5976,22 @@
               </a:rPr>
               <a:t>PIC</a:t>
             </a:r>
-            <a:endParaRPr b="0" lang="ru-RU" sz="1800" spc="-1" strike="noStrike">
-              <a:latin typeface="Arial"/>
-            </a:endParaRPr>
-          </a:p>
-        </p:txBody>
-      </p:sp>
-      <p:sp>
-        <p:nvSpPr>
-          <p:cNvPr id="91" name="TextBox 10"/>
+            <a:endParaRPr b="0" lang="en-US" sz="1800" spc="-1" strike="noStrike">
+              <a:latin typeface="Arial"/>
+            </a:endParaRPr>
+          </a:p>
+        </p:txBody>
+      </p:sp>
+      <p:sp>
+        <p:nvSpPr>
+          <p:cNvPr id="90" name="TextBox 10"/>
           <p:cNvSpPr/>
           <p:nvPr/>
         </p:nvSpPr>
         <p:spPr>
           <a:xfrm>
             <a:off x="6329520" y="3013560"/>
-            <a:ext cx="2429280" cy="713880"/>
+            <a:ext cx="2428920" cy="713520"/>
           </a:xfrm>
           <a:prstGeom prst="rect">
             <a:avLst/>
@@ -6466,22 +6038,22 @@
               </a:rPr>
               <a:t>3</a:t>
             </a:r>
-            <a:endParaRPr b="0" lang="ru-RU" sz="1400" spc="-1" strike="noStrike">
-              <a:latin typeface="Arial"/>
-            </a:endParaRPr>
-          </a:p>
-        </p:txBody>
-      </p:sp>
-      <p:sp>
-        <p:nvSpPr>
-          <p:cNvPr id="92" name="TextBox 10"/>
+            <a:endParaRPr b="0" lang="en-US" sz="1400" spc="-1" strike="noStrike">
+              <a:latin typeface="Arial"/>
+            </a:endParaRPr>
+          </a:p>
+        </p:txBody>
+      </p:sp>
+      <p:sp>
+        <p:nvSpPr>
+          <p:cNvPr id="91" name="TextBox 10"/>
           <p:cNvSpPr/>
           <p:nvPr/>
         </p:nvSpPr>
         <p:spPr>
           <a:xfrm>
             <a:off x="6329520" y="3798000"/>
-            <a:ext cx="2429280" cy="1037880"/>
+            <a:ext cx="2428920" cy="1037520"/>
           </a:xfrm>
           <a:prstGeom prst="rect">
             <a:avLst/>
@@ -6528,22 +6100,22 @@
               </a:rPr>
               <a:t>3</a:t>
             </a:r>
-            <a:endParaRPr b="0" lang="ru-RU" sz="1100" spc="-1" strike="noStrike">
-              <a:latin typeface="Arial"/>
-            </a:endParaRPr>
-          </a:p>
-        </p:txBody>
-      </p:sp>
-      <p:sp>
-        <p:nvSpPr>
-          <p:cNvPr id="93" name="Прямоугольник: скругленные углы 19"/>
+            <a:endParaRPr b="0" lang="en-US" sz="1100" spc="-1" strike="noStrike">
+              <a:latin typeface="Arial"/>
+            </a:endParaRPr>
+          </a:p>
+        </p:txBody>
+      </p:sp>
+      <p:sp>
+        <p:nvSpPr>
+          <p:cNvPr id="92" name="Прямоугольник: скругленные углы 19"/>
           <p:cNvSpPr/>
           <p:nvPr/>
         </p:nvSpPr>
         <p:spPr>
           <a:xfrm>
             <a:off x="6273000" y="1252800"/>
-            <a:ext cx="2557080" cy="3642840"/>
+            <a:ext cx="2556720" cy="3642480"/>
           </a:xfrm>
           <a:prstGeom prst="roundRect">
             <a:avLst>
@@ -6611,14 +6183,14 @@
       </p:grpSpPr>
       <p:sp>
         <p:nvSpPr>
-          <p:cNvPr id="94" name="Прямоугольник со скругленными углами 3"/>
+          <p:cNvPr id="93" name="Прямоугольник со скругленными углами 3"/>
           <p:cNvSpPr/>
           <p:nvPr/>
         </p:nvSpPr>
         <p:spPr>
           <a:xfrm>
             <a:off x="0" y="0"/>
-            <a:ext cx="3396960" cy="5143320"/>
+            <a:ext cx="3396600" cy="5142960"/>
           </a:xfrm>
           <a:prstGeom prst="roundRect">
             <a:avLst>
@@ -6669,22 +6241,22 @@
               </a:rPr>
               <a:t>PIC</a:t>
             </a:r>
-            <a:endParaRPr b="0" lang="ru-RU" sz="1800" spc="-1" strike="noStrike">
-              <a:latin typeface="Arial"/>
-            </a:endParaRPr>
-          </a:p>
-        </p:txBody>
-      </p:sp>
-      <p:sp>
-        <p:nvSpPr>
-          <p:cNvPr id="95" name="TextBox 10"/>
+            <a:endParaRPr b="0" lang="en-US" sz="1800" spc="-1" strike="noStrike">
+              <a:latin typeface="Arial"/>
+            </a:endParaRPr>
+          </a:p>
+        </p:txBody>
+      </p:sp>
+      <p:sp>
+        <p:nvSpPr>
+          <p:cNvPr id="94" name="TextBox 10"/>
           <p:cNvSpPr/>
           <p:nvPr/>
         </p:nvSpPr>
         <p:spPr>
           <a:xfrm>
             <a:off x="4192560" y="3830040"/>
-            <a:ext cx="4672440" cy="329040"/>
+            <a:ext cx="4672080" cy="328680"/>
           </a:xfrm>
           <a:prstGeom prst="rect">
             <a:avLst/>
@@ -6721,22 +6293,22 @@
               </a:rPr>
               <a:t>SUBTITLE3</a:t>
             </a:r>
-            <a:endParaRPr b="0" lang="ru-RU" sz="1400" spc="-1" strike="noStrike">
-              <a:latin typeface="Arial"/>
-            </a:endParaRPr>
-          </a:p>
-        </p:txBody>
-      </p:sp>
-      <p:sp>
-        <p:nvSpPr>
-          <p:cNvPr id="96" name="TextBox 10"/>
+            <a:endParaRPr b="0" lang="en-US" sz="1400" spc="-1" strike="noStrike">
+              <a:latin typeface="Arial"/>
+            </a:endParaRPr>
+          </a:p>
+        </p:txBody>
+      </p:sp>
+      <p:sp>
+        <p:nvSpPr>
+          <p:cNvPr id="95" name="TextBox 10"/>
           <p:cNvSpPr/>
           <p:nvPr/>
         </p:nvSpPr>
         <p:spPr>
           <a:xfrm>
             <a:off x="4192560" y="4188600"/>
-            <a:ext cx="4672440" cy="713880"/>
+            <a:ext cx="4672080" cy="713520"/>
           </a:xfrm>
           <a:prstGeom prst="rect">
             <a:avLst/>
@@ -6783,22 +6355,22 @@
               </a:rPr>
               <a:t>3</a:t>
             </a:r>
-            <a:endParaRPr b="0" lang="ru-RU" sz="1100" spc="-1" strike="noStrike">
-              <a:latin typeface="Arial"/>
-            </a:endParaRPr>
-          </a:p>
-        </p:txBody>
-      </p:sp>
-      <p:sp>
-        <p:nvSpPr>
-          <p:cNvPr id="97" name="Овал 9"/>
+            <a:endParaRPr b="0" lang="en-US" sz="1100" spc="-1" strike="noStrike">
+              <a:latin typeface="Arial"/>
+            </a:endParaRPr>
+          </a:p>
+        </p:txBody>
+      </p:sp>
+      <p:sp>
+        <p:nvSpPr>
+          <p:cNvPr id="96" name="Овал 9"/>
           <p:cNvSpPr/>
           <p:nvPr/>
         </p:nvSpPr>
         <p:spPr>
           <a:xfrm>
             <a:off x="3724560" y="3830040"/>
-            <a:ext cx="403200" cy="403200"/>
+            <a:ext cx="402840" cy="402840"/>
           </a:xfrm>
           <a:prstGeom prst="ellipse">
             <a:avLst/>
@@ -6841,25 +6413,26 @@
                   <a:srgbClr val="ffffff"/>
                 </a:solidFill>
                 <a:latin typeface="Calibri"/>
+                <a:ea typeface="DejaVu Sans"/>
               </a:rPr>
               <a:t>03</a:t>
             </a:r>
-            <a:endParaRPr b="0" lang="ru-RU" sz="800" spc="-1" strike="noStrike">
-              <a:latin typeface="Arial"/>
-            </a:endParaRPr>
-          </a:p>
-        </p:txBody>
-      </p:sp>
-      <p:sp>
-        <p:nvSpPr>
-          <p:cNvPr id="98" name="TextBox 10"/>
+            <a:endParaRPr b="0" lang="en-US" sz="800" spc="-1" strike="noStrike">
+              <a:latin typeface="Arial"/>
+            </a:endParaRPr>
+          </a:p>
+        </p:txBody>
+      </p:sp>
+      <p:sp>
+        <p:nvSpPr>
+          <p:cNvPr id="97" name="TextBox 10"/>
           <p:cNvSpPr/>
           <p:nvPr/>
         </p:nvSpPr>
         <p:spPr>
           <a:xfrm>
             <a:off x="4192560" y="2571840"/>
-            <a:ext cx="4672440" cy="329040"/>
+            <a:ext cx="4672080" cy="328680"/>
           </a:xfrm>
           <a:prstGeom prst="rect">
             <a:avLst/>
@@ -6906,22 +6479,22 @@
               </a:rPr>
               <a:t>2</a:t>
             </a:r>
-            <a:endParaRPr b="0" lang="ru-RU" sz="1400" spc="-1" strike="noStrike">
-              <a:latin typeface="Arial"/>
-            </a:endParaRPr>
-          </a:p>
-        </p:txBody>
-      </p:sp>
-      <p:sp>
-        <p:nvSpPr>
-          <p:cNvPr id="99" name="TextBox 10"/>
+            <a:endParaRPr b="0" lang="en-US" sz="1400" spc="-1" strike="noStrike">
+              <a:latin typeface="Arial"/>
+            </a:endParaRPr>
+          </a:p>
+        </p:txBody>
+      </p:sp>
+      <p:sp>
+        <p:nvSpPr>
+          <p:cNvPr id="98" name="TextBox 10"/>
           <p:cNvSpPr/>
           <p:nvPr/>
         </p:nvSpPr>
         <p:spPr>
           <a:xfrm>
             <a:off x="4192560" y="2930400"/>
-            <a:ext cx="4672440" cy="713880"/>
+            <a:ext cx="4672080" cy="713520"/>
           </a:xfrm>
           <a:prstGeom prst="rect">
             <a:avLst/>
@@ -6968,22 +6541,22 @@
               </a:rPr>
               <a:t>2</a:t>
             </a:r>
-            <a:endParaRPr b="0" lang="ru-RU" sz="1100" spc="-1" strike="noStrike">
-              <a:latin typeface="Arial"/>
-            </a:endParaRPr>
-          </a:p>
-        </p:txBody>
-      </p:sp>
-      <p:sp>
-        <p:nvSpPr>
-          <p:cNvPr id="100" name="Овал 13"/>
+            <a:endParaRPr b="0" lang="en-US" sz="1100" spc="-1" strike="noStrike">
+              <a:latin typeface="Arial"/>
+            </a:endParaRPr>
+          </a:p>
+        </p:txBody>
+      </p:sp>
+      <p:sp>
+        <p:nvSpPr>
+          <p:cNvPr id="99" name="Овал 13"/>
           <p:cNvSpPr/>
           <p:nvPr/>
         </p:nvSpPr>
         <p:spPr>
           <a:xfrm>
             <a:off x="3724560" y="2571840"/>
-            <a:ext cx="403200" cy="403200"/>
+            <a:ext cx="402840" cy="402840"/>
           </a:xfrm>
           <a:prstGeom prst="ellipse">
             <a:avLst/>
@@ -7026,25 +6599,26 @@
                   <a:srgbClr val="ffffff"/>
                 </a:solidFill>
                 <a:latin typeface="Calibri"/>
+                <a:ea typeface="DejaVu Sans"/>
               </a:rPr>
               <a:t>02</a:t>
             </a:r>
-            <a:endParaRPr b="0" lang="ru-RU" sz="800" spc="-1" strike="noStrike">
-              <a:latin typeface="Arial"/>
-            </a:endParaRPr>
-          </a:p>
-        </p:txBody>
-      </p:sp>
-      <p:sp>
-        <p:nvSpPr>
-          <p:cNvPr id="101" name="TextBox 10"/>
+            <a:endParaRPr b="0" lang="en-US" sz="800" spc="-1" strike="noStrike">
+              <a:latin typeface="Arial"/>
+            </a:endParaRPr>
+          </a:p>
+        </p:txBody>
+      </p:sp>
+      <p:sp>
+        <p:nvSpPr>
+          <p:cNvPr id="100" name="TextBox 10"/>
           <p:cNvSpPr/>
           <p:nvPr/>
         </p:nvSpPr>
         <p:spPr>
           <a:xfrm>
             <a:off x="4192560" y="1311840"/>
-            <a:ext cx="4672440" cy="329040"/>
+            <a:ext cx="4672080" cy="328680"/>
           </a:xfrm>
           <a:prstGeom prst="rect">
             <a:avLst/>
@@ -7091,22 +6665,22 @@
               </a:rPr>
               <a:t>1</a:t>
             </a:r>
-            <a:endParaRPr b="0" lang="ru-RU" sz="1400" spc="-1" strike="noStrike">
-              <a:latin typeface="Arial"/>
-            </a:endParaRPr>
-          </a:p>
-        </p:txBody>
-      </p:sp>
-      <p:sp>
-        <p:nvSpPr>
-          <p:cNvPr id="102" name="TextBox 10"/>
+            <a:endParaRPr b="0" lang="en-US" sz="1400" spc="-1" strike="noStrike">
+              <a:latin typeface="Arial"/>
+            </a:endParaRPr>
+          </a:p>
+        </p:txBody>
+      </p:sp>
+      <p:sp>
+        <p:nvSpPr>
+          <p:cNvPr id="101" name="TextBox 10"/>
           <p:cNvSpPr/>
           <p:nvPr/>
         </p:nvSpPr>
         <p:spPr>
           <a:xfrm>
             <a:off x="4192560" y="1670760"/>
-            <a:ext cx="4672440" cy="713880"/>
+            <a:ext cx="4672080" cy="713520"/>
           </a:xfrm>
           <a:prstGeom prst="rect">
             <a:avLst/>
@@ -7153,22 +6727,22 @@
               </a:rPr>
               <a:t>1</a:t>
             </a:r>
-            <a:endParaRPr b="0" lang="ru-RU" sz="1100" spc="-1" strike="noStrike">
-              <a:latin typeface="Arial"/>
-            </a:endParaRPr>
-          </a:p>
-        </p:txBody>
-      </p:sp>
-      <p:sp>
-        <p:nvSpPr>
-          <p:cNvPr id="103" name="Овал 16"/>
+            <a:endParaRPr b="0" lang="en-US" sz="1100" spc="-1" strike="noStrike">
+              <a:latin typeface="Arial"/>
+            </a:endParaRPr>
+          </a:p>
+        </p:txBody>
+      </p:sp>
+      <p:sp>
+        <p:nvSpPr>
+          <p:cNvPr id="102" name="Овал 16"/>
           <p:cNvSpPr/>
           <p:nvPr/>
         </p:nvSpPr>
         <p:spPr>
           <a:xfrm>
             <a:off x="3724560" y="1311840"/>
-            <a:ext cx="403200" cy="403200"/>
+            <a:ext cx="402840" cy="402840"/>
           </a:xfrm>
           <a:prstGeom prst="ellipse">
             <a:avLst/>
@@ -7211,25 +6785,26 @@
                   <a:srgbClr val="ffffff"/>
                 </a:solidFill>
                 <a:latin typeface="Calibri"/>
+                <a:ea typeface="DejaVu Sans"/>
               </a:rPr>
               <a:t>01</a:t>
             </a:r>
-            <a:endParaRPr b="0" lang="ru-RU" sz="800" spc="-1" strike="noStrike">
-              <a:latin typeface="Arial"/>
-            </a:endParaRPr>
-          </a:p>
-        </p:txBody>
-      </p:sp>
-      <p:sp>
-        <p:nvSpPr>
-          <p:cNvPr id="104" name="TextBox 17"/>
+            <a:endParaRPr b="0" lang="en-US" sz="800" spc="-1" strike="noStrike">
+              <a:latin typeface="Arial"/>
+            </a:endParaRPr>
+          </a:p>
+        </p:txBody>
+      </p:sp>
+      <p:sp>
+        <p:nvSpPr>
+          <p:cNvPr id="103" name="TextBox 17"/>
           <p:cNvSpPr/>
           <p:nvPr/>
         </p:nvSpPr>
         <p:spPr>
           <a:xfrm>
             <a:off x="3607560" y="215280"/>
-            <a:ext cx="5375160" cy="909720"/>
+            <a:ext cx="5374800" cy="909360"/>
           </a:xfrm>
           <a:prstGeom prst="rect">
             <a:avLst/>
@@ -7262,10 +6837,11 @@
                   <a:srgbClr val="ffffff"/>
                 </a:solidFill>
                 <a:latin typeface="Arial"/>
+                <a:ea typeface="DejaVu Sans"/>
               </a:rPr>
               <a:t>TITLE</a:t>
             </a:r>
-            <a:endParaRPr b="0" lang="ru-RU" sz="2200" spc="-1" strike="noStrike">
+            <a:endParaRPr b="0" lang="en-US" sz="2200" spc="-1" strike="noStrike">
               <a:latin typeface="Arial"/>
             </a:endParaRPr>
           </a:p>
@@ -7310,14 +6886,14 @@
       </p:grpSpPr>
       <p:sp>
         <p:nvSpPr>
-          <p:cNvPr id="105" name="Прямоугольник: скругленные углы 22"/>
+          <p:cNvPr id="104" name="Прямоугольник: скругленные углы 22"/>
           <p:cNvSpPr/>
           <p:nvPr/>
         </p:nvSpPr>
         <p:spPr>
           <a:xfrm>
             <a:off x="3417120" y="1051560"/>
-            <a:ext cx="5047920" cy="841680"/>
+            <a:ext cx="5047560" cy="841320"/>
           </a:xfrm>
           <a:prstGeom prst="roundRect">
             <a:avLst>
@@ -7348,14 +6924,14 @@
       </p:sp>
       <p:sp>
         <p:nvSpPr>
-          <p:cNvPr id="106" name="Прямоугольник: скругленные углы 28"/>
+          <p:cNvPr id="105" name="Прямоугольник: скругленные углы 28"/>
           <p:cNvSpPr/>
           <p:nvPr/>
         </p:nvSpPr>
         <p:spPr>
           <a:xfrm>
             <a:off x="3417120" y="2451960"/>
-            <a:ext cx="5047920" cy="841680"/>
+            <a:ext cx="5047560" cy="841320"/>
           </a:xfrm>
           <a:prstGeom prst="roundRect">
             <a:avLst>
@@ -7386,14 +6962,14 @@
       </p:sp>
       <p:sp>
         <p:nvSpPr>
-          <p:cNvPr id="107" name="Прямоугольник: скругленные углы 32"/>
+          <p:cNvPr id="106" name="Прямоугольник: скругленные углы 32"/>
           <p:cNvSpPr/>
           <p:nvPr/>
         </p:nvSpPr>
         <p:spPr>
           <a:xfrm>
             <a:off x="3417120" y="3849840"/>
-            <a:ext cx="5047920" cy="841680"/>
+            <a:ext cx="5047560" cy="841320"/>
           </a:xfrm>
           <a:prstGeom prst="roundRect">
             <a:avLst>
@@ -7424,14 +7000,14 @@
       </p:sp>
       <p:sp>
         <p:nvSpPr>
-          <p:cNvPr id="108" name="TextBox 10"/>
+          <p:cNvPr id="107" name="TextBox 10"/>
           <p:cNvSpPr/>
           <p:nvPr/>
         </p:nvSpPr>
         <p:spPr>
           <a:xfrm>
             <a:off x="3821760" y="1115280"/>
-            <a:ext cx="4483800" cy="713880"/>
+            <a:ext cx="4483440" cy="713520"/>
           </a:xfrm>
           <a:prstGeom prst="rect">
             <a:avLst/>
@@ -7478,15 +7054,15 @@
               </a:rPr>
               <a:t>1</a:t>
             </a:r>
-            <a:endParaRPr b="0" lang="ru-RU" sz="1100" spc="-1" strike="noStrike">
-              <a:latin typeface="Arial"/>
-            </a:endParaRPr>
-          </a:p>
-        </p:txBody>
-      </p:sp>
-      <p:sp>
-        <p:nvSpPr>
-          <p:cNvPr id="109" name="Прямая соединительная линия 4"/>
+            <a:endParaRPr b="0" lang="en-US" sz="1100" spc="-1" strike="noStrike">
+              <a:latin typeface="Arial"/>
+            </a:endParaRPr>
+          </a:p>
+        </p:txBody>
+      </p:sp>
+      <p:sp>
+        <p:nvSpPr>
+          <p:cNvPr id="108" name="Прямая соединительная линия 4"/>
           <p:cNvSpPr/>
           <p:nvPr/>
         </p:nvSpPr>
@@ -7519,14 +7095,14 @@
       </p:sp>
       <p:sp>
         <p:nvSpPr>
-          <p:cNvPr id="110" name="Прямоугольник: скругленные углы 19"/>
+          <p:cNvPr id="109" name="Прямоугольник: скругленные углы 19"/>
           <p:cNvSpPr/>
           <p:nvPr/>
         </p:nvSpPr>
         <p:spPr>
           <a:xfrm>
             <a:off x="1135800" y="1033200"/>
-            <a:ext cx="2642760" cy="880920"/>
+            <a:ext cx="2642400" cy="880560"/>
           </a:xfrm>
           <a:prstGeom prst="roundRect">
             <a:avLst>
@@ -7557,14 +7133,14 @@
       </p:sp>
       <p:sp>
         <p:nvSpPr>
-          <p:cNvPr id="111" name="TextBox 10"/>
+          <p:cNvPr id="110" name="TextBox 10"/>
           <p:cNvSpPr/>
           <p:nvPr/>
         </p:nvSpPr>
         <p:spPr>
           <a:xfrm>
             <a:off x="1164600" y="1033200"/>
-            <a:ext cx="2546280" cy="880920"/>
+            <a:ext cx="2545920" cy="880560"/>
           </a:xfrm>
           <a:prstGeom prst="rect">
             <a:avLst/>
@@ -7611,22 +7187,22 @@
               </a:rPr>
               <a:t>1</a:t>
             </a:r>
-            <a:endParaRPr b="0" lang="ru-RU" sz="1400" spc="-1" strike="noStrike">
-              <a:latin typeface="Arial"/>
-            </a:endParaRPr>
-          </a:p>
-        </p:txBody>
-      </p:sp>
-      <p:sp>
-        <p:nvSpPr>
-          <p:cNvPr id="112" name="TextBox 10"/>
+            <a:endParaRPr b="0" lang="en-US" sz="1400" spc="-1" strike="noStrike">
+              <a:latin typeface="Arial"/>
+            </a:endParaRPr>
+          </a:p>
+        </p:txBody>
+      </p:sp>
+      <p:sp>
+        <p:nvSpPr>
+          <p:cNvPr id="111" name="TextBox 10"/>
           <p:cNvSpPr/>
           <p:nvPr/>
         </p:nvSpPr>
         <p:spPr>
           <a:xfrm>
             <a:off x="3821760" y="2515680"/>
-            <a:ext cx="4483800" cy="713880"/>
+            <a:ext cx="4483440" cy="713520"/>
           </a:xfrm>
           <a:prstGeom prst="rect">
             <a:avLst/>
@@ -7673,22 +7249,22 @@
               </a:rPr>
               <a:t>2</a:t>
             </a:r>
-            <a:endParaRPr b="0" lang="ru-RU" sz="1100" spc="-1" strike="noStrike">
-              <a:latin typeface="Arial"/>
-            </a:endParaRPr>
-          </a:p>
-        </p:txBody>
-      </p:sp>
-      <p:sp>
-        <p:nvSpPr>
-          <p:cNvPr id="113" name="Прямоугольник: скругленные углы 26"/>
+            <a:endParaRPr b="0" lang="en-US" sz="1100" spc="-1" strike="noStrike">
+              <a:latin typeface="Arial"/>
+            </a:endParaRPr>
+          </a:p>
+        </p:txBody>
+      </p:sp>
+      <p:sp>
+        <p:nvSpPr>
+          <p:cNvPr id="112" name="Прямоугольник: скругленные углы 26"/>
           <p:cNvSpPr/>
           <p:nvPr/>
         </p:nvSpPr>
         <p:spPr>
           <a:xfrm>
             <a:off x="1135800" y="2433600"/>
-            <a:ext cx="2642760" cy="880920"/>
+            <a:ext cx="2642400" cy="880560"/>
           </a:xfrm>
           <a:prstGeom prst="roundRect">
             <a:avLst>
@@ -7719,14 +7295,14 @@
       </p:sp>
       <p:sp>
         <p:nvSpPr>
-          <p:cNvPr id="114" name="TextBox 10"/>
+          <p:cNvPr id="113" name="TextBox 10"/>
           <p:cNvSpPr/>
           <p:nvPr/>
         </p:nvSpPr>
         <p:spPr>
           <a:xfrm>
             <a:off x="1164600" y="2433600"/>
-            <a:ext cx="2546280" cy="880920"/>
+            <a:ext cx="2545920" cy="880560"/>
           </a:xfrm>
           <a:prstGeom prst="rect">
             <a:avLst/>
@@ -7773,22 +7349,22 @@
               </a:rPr>
               <a:t>2</a:t>
             </a:r>
-            <a:endParaRPr b="0" lang="ru-RU" sz="1400" spc="-1" strike="noStrike">
-              <a:latin typeface="Arial"/>
-            </a:endParaRPr>
-          </a:p>
-        </p:txBody>
-      </p:sp>
-      <p:sp>
-        <p:nvSpPr>
-          <p:cNvPr id="115" name="TextBox 10"/>
+            <a:endParaRPr b="0" lang="en-US" sz="1400" spc="-1" strike="noStrike">
+              <a:latin typeface="Arial"/>
+            </a:endParaRPr>
+          </a:p>
+        </p:txBody>
+      </p:sp>
+      <p:sp>
+        <p:nvSpPr>
+          <p:cNvPr id="114" name="TextBox 10"/>
           <p:cNvSpPr/>
           <p:nvPr/>
         </p:nvSpPr>
         <p:spPr>
           <a:xfrm>
             <a:off x="3821760" y="3913560"/>
-            <a:ext cx="4483800" cy="713880"/>
+            <a:ext cx="4483440" cy="713520"/>
           </a:xfrm>
           <a:prstGeom prst="rect">
             <a:avLst/>
@@ -7835,22 +7411,22 @@
               </a:rPr>
               <a:t>3</a:t>
             </a:r>
-            <a:endParaRPr b="0" lang="ru-RU" sz="1100" spc="-1" strike="noStrike">
-              <a:latin typeface="Arial"/>
-            </a:endParaRPr>
-          </a:p>
-        </p:txBody>
-      </p:sp>
-      <p:sp>
-        <p:nvSpPr>
-          <p:cNvPr id="116" name="Прямоугольник: скругленные углы 30"/>
+            <a:endParaRPr b="0" lang="en-US" sz="1100" spc="-1" strike="noStrike">
+              <a:latin typeface="Arial"/>
+            </a:endParaRPr>
+          </a:p>
+        </p:txBody>
+      </p:sp>
+      <p:sp>
+        <p:nvSpPr>
+          <p:cNvPr id="115" name="Прямоугольник: скругленные углы 30"/>
           <p:cNvSpPr/>
           <p:nvPr/>
         </p:nvSpPr>
         <p:spPr>
           <a:xfrm>
             <a:off x="1135800" y="3831480"/>
-            <a:ext cx="2642760" cy="880920"/>
+            <a:ext cx="2642400" cy="880560"/>
           </a:xfrm>
           <a:prstGeom prst="roundRect">
             <a:avLst>
@@ -7881,14 +7457,14 @@
       </p:sp>
       <p:sp>
         <p:nvSpPr>
-          <p:cNvPr id="117" name="TextBox 10"/>
+          <p:cNvPr id="116" name="TextBox 10"/>
           <p:cNvSpPr/>
           <p:nvPr/>
         </p:nvSpPr>
         <p:spPr>
           <a:xfrm>
             <a:off x="1164600" y="3831480"/>
-            <a:ext cx="2546280" cy="880920"/>
+            <a:ext cx="2545920" cy="880560"/>
           </a:xfrm>
           <a:prstGeom prst="rect">
             <a:avLst/>
@@ -7935,22 +7511,22 @@
               </a:rPr>
               <a:t>3</a:t>
             </a:r>
-            <a:endParaRPr b="0" lang="ru-RU" sz="1400" spc="-1" strike="noStrike">
-              <a:latin typeface="Arial"/>
-            </a:endParaRPr>
-          </a:p>
-        </p:txBody>
-      </p:sp>
-      <p:sp>
-        <p:nvSpPr>
-          <p:cNvPr id="118" name="Овал 5"/>
+            <a:endParaRPr b="0" lang="en-US" sz="1400" spc="-1" strike="noStrike">
+              <a:latin typeface="Arial"/>
+            </a:endParaRPr>
+          </a:p>
+        </p:txBody>
+      </p:sp>
+      <p:sp>
+        <p:nvSpPr>
+          <p:cNvPr id="117" name="Овал 5"/>
           <p:cNvSpPr/>
           <p:nvPr/>
         </p:nvSpPr>
         <p:spPr>
           <a:xfrm>
             <a:off x="675360" y="1365840"/>
-            <a:ext cx="221040" cy="221040"/>
+            <a:ext cx="220680" cy="220680"/>
           </a:xfrm>
           <a:prstGeom prst="ellipse">
             <a:avLst/>
@@ -7984,14 +7560,14 @@
       </p:sp>
       <p:sp>
         <p:nvSpPr>
-          <p:cNvPr id="119" name="Овал 33"/>
+          <p:cNvPr id="118" name="Овал 33"/>
           <p:cNvSpPr/>
           <p:nvPr/>
         </p:nvSpPr>
         <p:spPr>
           <a:xfrm>
             <a:off x="675360" y="2728080"/>
-            <a:ext cx="221040" cy="221040"/>
+            <a:ext cx="220680" cy="220680"/>
           </a:xfrm>
           <a:prstGeom prst="ellipse">
             <a:avLst/>
@@ -8025,14 +7601,14 @@
       </p:sp>
       <p:sp>
         <p:nvSpPr>
-          <p:cNvPr id="120" name="Овал 34"/>
+          <p:cNvPr id="119" name="Овал 34"/>
           <p:cNvSpPr/>
           <p:nvPr/>
         </p:nvSpPr>
         <p:spPr>
           <a:xfrm>
             <a:off x="671760" y="4156200"/>
-            <a:ext cx="221040" cy="221040"/>
+            <a:ext cx="220680" cy="220680"/>
           </a:xfrm>
           <a:prstGeom prst="ellipse">
             <a:avLst/>
@@ -8066,14 +7642,14 @@
       </p:sp>
       <p:sp>
         <p:nvSpPr>
-          <p:cNvPr id="121" name="TextBox 20"/>
+          <p:cNvPr id="120" name="TextBox 20"/>
           <p:cNvSpPr/>
           <p:nvPr/>
         </p:nvSpPr>
         <p:spPr>
           <a:xfrm>
             <a:off x="381600" y="271080"/>
-            <a:ext cx="8465760" cy="480960"/>
+            <a:ext cx="8465400" cy="480600"/>
           </a:xfrm>
           <a:prstGeom prst="rect">
             <a:avLst/>
@@ -8106,10 +7682,11 @@
                   <a:srgbClr val="ffffff"/>
                 </a:solidFill>
                 <a:latin typeface="Arial"/>
+                <a:ea typeface="DejaVu Sans"/>
               </a:rPr>
               <a:t>TITLE</a:t>
             </a:r>
-            <a:endParaRPr b="0" lang="ru-RU" sz="2200" spc="-1" strike="noStrike">
+            <a:endParaRPr b="0" lang="en-US" sz="2200" spc="-1" strike="noStrike">
               <a:latin typeface="Arial"/>
             </a:endParaRPr>
           </a:p>
@@ -8154,14 +7731,14 @@
       </p:grpSpPr>
       <p:sp>
         <p:nvSpPr>
-          <p:cNvPr id="122" name="Прямоугольник со скругленными углами 3"/>
+          <p:cNvPr id="121" name="Прямоугольник со скругленными углами 3"/>
           <p:cNvSpPr/>
           <p:nvPr/>
         </p:nvSpPr>
         <p:spPr>
           <a:xfrm>
             <a:off x="0" y="3181680"/>
-            <a:ext cx="9143640" cy="1961640"/>
+            <a:ext cx="9143280" cy="1961280"/>
           </a:xfrm>
           <a:prstGeom prst="roundRect">
             <a:avLst>
@@ -8212,22 +7789,22 @@
               </a:rPr>
               <a:t>PIC</a:t>
             </a:r>
-            <a:endParaRPr b="0" lang="ru-RU" sz="1800" spc="-1" strike="noStrike">
-              <a:latin typeface="Arial"/>
-            </a:endParaRPr>
-          </a:p>
-        </p:txBody>
-      </p:sp>
-      <p:sp>
-        <p:nvSpPr>
-          <p:cNvPr id="123" name="TextBox 10"/>
+            <a:endParaRPr b="0" lang="en-US" sz="1800" spc="-1" strike="noStrike">
+              <a:latin typeface="Arial"/>
+            </a:endParaRPr>
+          </a:p>
+        </p:txBody>
+      </p:sp>
+      <p:sp>
+        <p:nvSpPr>
+          <p:cNvPr id="122" name="TextBox 10"/>
           <p:cNvSpPr/>
           <p:nvPr/>
         </p:nvSpPr>
         <p:spPr>
           <a:xfrm>
             <a:off x="384840" y="801360"/>
-            <a:ext cx="2443680" cy="713880"/>
+            <a:ext cx="2443320" cy="713520"/>
           </a:xfrm>
           <a:prstGeom prst="rect">
             <a:avLst/>
@@ -8264,22 +7841,22 @@
               </a:rPr>
               <a:t>SUBTITLE1</a:t>
             </a:r>
-            <a:endParaRPr b="0" lang="ru-RU" sz="1400" spc="-1" strike="noStrike">
-              <a:latin typeface="Arial"/>
-            </a:endParaRPr>
-          </a:p>
-        </p:txBody>
-      </p:sp>
-      <p:sp>
-        <p:nvSpPr>
-          <p:cNvPr id="124" name="TextBox 10"/>
+            <a:endParaRPr b="0" lang="en-US" sz="1400" spc="-1" strike="noStrike">
+              <a:latin typeface="Arial"/>
+            </a:endParaRPr>
+          </a:p>
+        </p:txBody>
+      </p:sp>
+      <p:sp>
+        <p:nvSpPr>
+          <p:cNvPr id="123" name="TextBox 10"/>
           <p:cNvSpPr/>
           <p:nvPr/>
         </p:nvSpPr>
         <p:spPr>
           <a:xfrm>
             <a:off x="384840" y="1585800"/>
-            <a:ext cx="2443680" cy="1565280"/>
+            <a:ext cx="2443320" cy="1564920"/>
           </a:xfrm>
           <a:prstGeom prst="rect">
             <a:avLst/>
@@ -8326,22 +7903,22 @@
               </a:rPr>
               <a:t>1</a:t>
             </a:r>
-            <a:endParaRPr b="0" lang="ru-RU" sz="1100" spc="-1" strike="noStrike">
-              <a:latin typeface="Arial"/>
-            </a:endParaRPr>
-          </a:p>
-        </p:txBody>
-      </p:sp>
-      <p:sp>
-        <p:nvSpPr>
-          <p:cNvPr id="125" name="TextBox 10"/>
+            <a:endParaRPr b="0" lang="en-US" sz="1100" spc="-1" strike="noStrike">
+              <a:latin typeface="Arial"/>
+            </a:endParaRPr>
+          </a:p>
+        </p:txBody>
+      </p:sp>
+      <p:sp>
+        <p:nvSpPr>
+          <p:cNvPr id="124" name="TextBox 10"/>
           <p:cNvSpPr/>
           <p:nvPr/>
         </p:nvSpPr>
         <p:spPr>
           <a:xfrm>
             <a:off x="3269880" y="801360"/>
-            <a:ext cx="2443680" cy="713880"/>
+            <a:ext cx="2443320" cy="713520"/>
           </a:xfrm>
           <a:prstGeom prst="rect">
             <a:avLst/>
@@ -8378,22 +7955,22 @@
               </a:rPr>
               <a:t>SUBTITLE2</a:t>
             </a:r>
-            <a:endParaRPr b="0" lang="ru-RU" sz="1400" spc="-1" strike="noStrike">
-              <a:latin typeface="Arial"/>
-            </a:endParaRPr>
-          </a:p>
-        </p:txBody>
-      </p:sp>
-      <p:sp>
-        <p:nvSpPr>
-          <p:cNvPr id="126" name="TextBox 10"/>
+            <a:endParaRPr b="0" lang="en-US" sz="1400" spc="-1" strike="noStrike">
+              <a:latin typeface="Arial"/>
+            </a:endParaRPr>
+          </a:p>
+        </p:txBody>
+      </p:sp>
+      <p:sp>
+        <p:nvSpPr>
+          <p:cNvPr id="125" name="TextBox 10"/>
           <p:cNvSpPr/>
           <p:nvPr/>
         </p:nvSpPr>
         <p:spPr>
           <a:xfrm>
             <a:off x="3269880" y="1585800"/>
-            <a:ext cx="2443680" cy="1565280"/>
+            <a:ext cx="2443320" cy="1564920"/>
           </a:xfrm>
           <a:prstGeom prst="rect">
             <a:avLst/>
@@ -8440,22 +8017,22 @@
               </a:rPr>
               <a:t>2</a:t>
             </a:r>
-            <a:endParaRPr b="0" lang="ru-RU" sz="1100" spc="-1" strike="noStrike">
-              <a:latin typeface="Arial"/>
-            </a:endParaRPr>
-          </a:p>
-        </p:txBody>
-      </p:sp>
-      <p:sp>
-        <p:nvSpPr>
-          <p:cNvPr id="127" name="TextBox 10"/>
+            <a:endParaRPr b="0" lang="en-US" sz="1100" spc="-1" strike="noStrike">
+              <a:latin typeface="Arial"/>
+            </a:endParaRPr>
+          </a:p>
+        </p:txBody>
+      </p:sp>
+      <p:sp>
+        <p:nvSpPr>
+          <p:cNvPr id="126" name="TextBox 10"/>
           <p:cNvSpPr/>
           <p:nvPr/>
         </p:nvSpPr>
         <p:spPr>
           <a:xfrm>
             <a:off x="6154560" y="801360"/>
-            <a:ext cx="2665080" cy="713880"/>
+            <a:ext cx="2664720" cy="713520"/>
           </a:xfrm>
           <a:prstGeom prst="rect">
             <a:avLst/>
@@ -8492,22 +8069,22 @@
               </a:rPr>
               <a:t>SUBTITLE3</a:t>
             </a:r>
-            <a:endParaRPr b="0" lang="ru-RU" sz="1400" spc="-1" strike="noStrike">
-              <a:latin typeface="Arial"/>
-            </a:endParaRPr>
-          </a:p>
-        </p:txBody>
-      </p:sp>
-      <p:sp>
-        <p:nvSpPr>
-          <p:cNvPr id="128" name="TextBox 10"/>
+            <a:endParaRPr b="0" lang="en-US" sz="1400" spc="-1" strike="noStrike">
+              <a:latin typeface="Arial"/>
+            </a:endParaRPr>
+          </a:p>
+        </p:txBody>
+      </p:sp>
+      <p:sp>
+        <p:nvSpPr>
+          <p:cNvPr id="127" name="TextBox 10"/>
           <p:cNvSpPr/>
           <p:nvPr/>
         </p:nvSpPr>
         <p:spPr>
           <a:xfrm>
             <a:off x="6154560" y="1585800"/>
-            <a:ext cx="2665080" cy="1565280"/>
+            <a:ext cx="2664720" cy="1564920"/>
           </a:xfrm>
           <a:prstGeom prst="rect">
             <a:avLst/>
@@ -8554,22 +8131,22 @@
               </a:rPr>
               <a:t>3</a:t>
             </a:r>
-            <a:endParaRPr b="0" lang="ru-RU" sz="1100" spc="-1" strike="noStrike">
-              <a:latin typeface="Arial"/>
-            </a:endParaRPr>
-          </a:p>
-        </p:txBody>
-      </p:sp>
-      <p:sp>
-        <p:nvSpPr>
-          <p:cNvPr id="129" name="TextBox 13"/>
+            <a:endParaRPr b="0" lang="en-US" sz="1100" spc="-1" strike="noStrike">
+              <a:latin typeface="Arial"/>
+            </a:endParaRPr>
+          </a:p>
+        </p:txBody>
+      </p:sp>
+      <p:sp>
+        <p:nvSpPr>
+          <p:cNvPr id="128" name="TextBox 13"/>
           <p:cNvSpPr/>
           <p:nvPr/>
         </p:nvSpPr>
         <p:spPr>
           <a:xfrm>
             <a:off x="384840" y="268920"/>
-            <a:ext cx="8465760" cy="480960"/>
+            <a:ext cx="8465400" cy="480600"/>
           </a:xfrm>
           <a:prstGeom prst="rect">
             <a:avLst/>
@@ -8602,10 +8179,11 @@
                   <a:srgbClr val="ffffff"/>
                 </a:solidFill>
                 <a:latin typeface="Arial"/>
+                <a:ea typeface="DejaVu Sans"/>
               </a:rPr>
               <a:t>TITLE</a:t>
             </a:r>
-            <a:endParaRPr b="0" lang="ru-RU" sz="2200" spc="-1" strike="noStrike">
+            <a:endParaRPr b="0" lang="en-US" sz="2200" spc="-1" strike="noStrike">
               <a:latin typeface="Arial"/>
             </a:endParaRPr>
           </a:p>
@@ -8616,7 +8194,7 @@
               </a:lnSpc>
               <a:buNone/>
             </a:pPr>
-            <a:endParaRPr b="0" lang="ru-RU" sz="2200" spc="-1" strike="noStrike">
+            <a:endParaRPr b="0" lang="en-US" sz="2200" spc="-1" strike="noStrike">
               <a:latin typeface="Arial"/>
             </a:endParaRPr>
           </a:p>
@@ -8624,7 +8202,7 @@
       </p:sp>
       <p:grpSp>
         <p:nvGrpSpPr>
-          <p:cNvPr id="130" name="Группа 8"/>
+          <p:cNvPr id="129" name="Группа 8"/>
           <p:cNvGrpSpPr/>
           <p:nvPr/>
         </p:nvGrpSpPr>
@@ -8638,7 +8216,7 @@
         </p:grpSpPr>
         <p:sp>
           <p:nvSpPr>
-            <p:cNvPr id="131" name="Прямая соединительная линия 7"/>
+            <p:cNvPr id="130" name="Прямая соединительная линия 7"/>
             <p:cNvSpPr/>
             <p:nvPr/>
           </p:nvSpPr>
@@ -8671,7 +8249,7 @@
         </p:sp>
         <p:sp>
           <p:nvSpPr>
-            <p:cNvPr id="132" name="Прямая соединительная линия 22"/>
+            <p:cNvPr id="131" name="Прямая соединительная линия 22"/>
             <p:cNvSpPr/>
             <p:nvPr/>
           </p:nvSpPr>
@@ -8705,7 +8283,7 @@
       </p:grpSp>
       <p:grpSp>
         <p:nvGrpSpPr>
-          <p:cNvPr id="133" name="Группа 23"/>
+          <p:cNvPr id="132" name="Группа 23"/>
           <p:cNvGrpSpPr/>
           <p:nvPr/>
         </p:nvGrpSpPr>
@@ -8719,7 +8297,7 @@
         </p:grpSpPr>
         <p:sp>
           <p:nvSpPr>
-            <p:cNvPr id="134" name="Прямая соединительная линия 30"/>
+            <p:cNvPr id="133" name="Прямая соединительная линия 30"/>
             <p:cNvSpPr/>
             <p:nvPr/>
           </p:nvSpPr>
@@ -8752,7 +8330,7 @@
         </p:sp>
         <p:sp>
           <p:nvSpPr>
-            <p:cNvPr id="135" name="Прямая соединительная линия 31"/>
+            <p:cNvPr id="134" name="Прямая соединительная линия 31"/>
             <p:cNvSpPr/>
             <p:nvPr/>
           </p:nvSpPr>
@@ -8823,14 +8401,14 @@
       </p:grpSpPr>
       <p:sp>
         <p:nvSpPr>
-          <p:cNvPr id="136" name="Прямоугольник со скругленными углами 3"/>
+          <p:cNvPr id="135" name="Прямоугольник со скругленными углами 3"/>
           <p:cNvSpPr/>
           <p:nvPr/>
         </p:nvSpPr>
         <p:spPr>
           <a:xfrm>
             <a:off x="186840" y="185400"/>
-            <a:ext cx="8770320" cy="4758120"/>
+            <a:ext cx="8769960" cy="4757760"/>
           </a:xfrm>
           <a:prstGeom prst="roundRect">
             <a:avLst>
@@ -8861,14 +8439,14 @@
       </p:sp>
       <p:sp>
         <p:nvSpPr>
-          <p:cNvPr id="137" name="Прямоугольник 10"/>
+          <p:cNvPr id="136" name="Прямоугольник 10"/>
           <p:cNvSpPr/>
           <p:nvPr/>
         </p:nvSpPr>
         <p:spPr>
           <a:xfrm>
             <a:off x="460080" y="658080"/>
-            <a:ext cx="8469000" cy="3306960"/>
+            <a:ext cx="8468640" cy="3306600"/>
           </a:xfrm>
           <a:prstGeom prst="rect">
             <a:avLst/>
@@ -8905,7 +8483,7 @@
               </a:rPr>
               <a:t>TITLE</a:t>
             </a:r>
-            <a:endParaRPr b="0" lang="ru-RU" sz="5400" spc="-1" strike="noStrike">
+            <a:endParaRPr b="0" lang="en-US" sz="5400" spc="-1" strike="noStrike">
               <a:latin typeface="Arial"/>
             </a:endParaRPr>
           </a:p>
